--- a/doc/최종산출물/5.화면설계서.pptx
+++ b/doc/최종산출물/5.화면설계서.pptx
@@ -4,6 +4,9 @@
   <p:sldMasterIdLst>
     <p:sldMasterId id="2147483648" r:id="rId1"/>
   </p:sldMasterIdLst>
+  <p:notesMasterIdLst>
+    <p:notesMasterId r:id="rId17"/>
+  </p:notesMasterIdLst>
   <p:sldIdLst>
     <p:sldId id="256" r:id="rId2"/>
     <p:sldId id="257" r:id="rId3"/>
@@ -21,10 +24,7 @@
     <p:sldId id="269" r:id="rId15"/>
     <p:sldId id="270" r:id="rId16"/>
   </p:sldIdLst>
-  <p:notesMasterIdLst>
-    <p:notesMasterId r:id="rId17"/>
-  </p:notesMasterIdLst>
-  <p:sldSz cx="9144000" cy="5143500"/>
+  <p:sldSz cx="9144000" cy="5143500" type="screen16x9"/>
   <p:notesSz cx="5143500" cy="9144000"/>
   <p:defaultTextStyle>
     <a:lvl1pPr marL="0" algn="l" defTabSz="914400" rtl="0" eaLnBrk="1" latinLnBrk="0" hangingPunct="1">
@@ -118,6 +118,11 @@
       </a:defRPr>
     </a:lvl9pPr>
   </p:defaultTextStyle>
+  <p:extLst>
+    <p:ext uri="{EFAFB233-063F-42B5-8137-9DF3F51BA10A}">
+      <p15:sldGuideLst xmlns:p15="http://schemas.microsoft.com/office/powerpoint/2012/main"/>
+    </p:ext>
+  </p:extLst>
 </p:presentation>
 </file>
 
@@ -143,240 +148,16 @@
           <a:chExt cx="0" cy="0"/>
         </a:xfrm>
       </p:grpSpPr>
-      <p:sp>
-        <p:nvSpPr>
-          <p:cNvPr id="2" name="Header Placeholder 1"/>
-          <p:cNvSpPr>
-            <a:spLocks noGrp="1"/>
-          </p:cNvSpPr>
-          <p:nvPr>
-            <p:ph type="hdr" sz="quarter"/>
-          </p:nvPr>
-        </p:nvSpPr>
-        <p:spPr>
-          <a:xfrm>
-            <a:off x="0" y="0"/>
-            <a:ext cx="2971800" cy="458788"/>
-          </a:xfrm>
-          <a:prstGeom prst="rect">
-            <a:avLst/>
-          </a:prstGeom>
-        </p:spPr>
-        <p:txBody>
-          <a:bodyPr vert="horz" lIns="91440" tIns="45720" rIns="91440" bIns="45720" rtlCol="0"/>
-          <a:lstStyle>
-            <a:lvl1pPr algn="l">
-              <a:defRPr sz="1200"/>
-            </a:lvl1pPr>
-          </a:lstStyle>
-          <a:p>
-            <a:endParaRPr lang="en-US"/>
-          </a:p>
-        </p:txBody>
-      </p:sp>
-      <p:sp>
-        <p:nvSpPr>
-          <p:cNvPr id="3" name="Date Placeholder 2"/>
-          <p:cNvSpPr>
-            <a:spLocks noGrp="1"/>
-          </p:cNvSpPr>
-          <p:nvPr>
-            <p:ph type="dt" idx="1"/>
-          </p:nvPr>
-        </p:nvSpPr>
-        <p:spPr>
-          <a:xfrm>
-            <a:off x="3884613" y="0"/>
-            <a:ext cx="2971800" cy="458788"/>
-          </a:xfrm>
-          <a:prstGeom prst="rect">
-            <a:avLst/>
-          </a:prstGeom>
-        </p:spPr>
-        <p:txBody>
-          <a:bodyPr vert="horz" lIns="91440" tIns="45720" rIns="91440" bIns="45720" rtlCol="0"/>
-          <a:lstStyle>
-            <a:lvl1pPr algn="r">
-              <a:defRPr sz="1200"/>
-            </a:lvl1pPr>
-          </a:lstStyle>
-          <a:p>
-            <a:fld id="{5282F153-3F37-0F45-9E97-73ACFA13230C}" type="datetimeFigureOut">
-              <a:rPr lang="en-US"/>
-              <a:t>7/23/19</a:t>
-            </a:fld>
-            <a:endParaRPr lang="en-US"/>
-          </a:p>
-        </p:txBody>
-      </p:sp>
-      <p:sp>
-        <p:nvSpPr>
-          <p:cNvPr id="4" name="Slide Image Placeholder 3"/>
-          <p:cNvSpPr>
-            <a:spLocks noGrp="1" noRot="1" noChangeAspect="1"/>
-          </p:cNvSpPr>
-          <p:nvPr>
-            <p:ph type="sldImg" idx="2"/>
-          </p:nvPr>
-        </p:nvSpPr>
-        <p:spPr>
-          <a:xfrm>
-            <a:off x="685800" y="1143000"/>
-            <a:ext cx="5486400" cy="3086100"/>
-          </a:xfrm>
-          <a:prstGeom prst="rect">
-            <a:avLst/>
-          </a:prstGeom>
-          <a:noFill/>
-          <a:ln w="12700">
-            <a:solidFill>
-              <a:prstClr val="black"/>
-            </a:solidFill>
-          </a:ln>
-        </p:spPr>
-        <p:txBody>
-          <a:bodyPr vert="horz" lIns="91440" tIns="45720" rIns="91440" bIns="45720" rtlCol="0" anchor="ctr"/>
-          <a:lstStyle/>
-          <a:p>
-            <a:endParaRPr lang="en-US"/>
-          </a:p>
-        </p:txBody>
-      </p:sp>
-      <p:sp>
-        <p:nvSpPr>
-          <p:cNvPr id="5" name="Notes Placeholder 4"/>
-          <p:cNvSpPr>
-            <a:spLocks noGrp="1"/>
-          </p:cNvSpPr>
-          <p:nvPr>
-            <p:ph type="body" sz="quarter" idx="3"/>
-          </p:nvPr>
-        </p:nvSpPr>
-        <p:spPr>
-          <a:xfrm>
-            <a:off x="685800" y="4400550"/>
-            <a:ext cx="5486400" cy="3600450"/>
-          </a:xfrm>
-          <a:prstGeom prst="rect">
-            <a:avLst/>
-          </a:prstGeom>
-        </p:spPr>
-        <p:txBody>
-          <a:bodyPr vert="horz" lIns="91440" tIns="45720" rIns="91440" bIns="45720" rtlCol="0"/>
-          <a:lstStyle/>
-          <a:p>
-            <a:pPr lvl="0"/>
-            <a:r>
-              <a:rPr lang="en-US"/>
-              <a:t>Click to edit Master text styles</a:t>
-            </a:r>
-          </a:p>
-          <a:p>
-            <a:pPr lvl="1"/>
-            <a:r>
-              <a:rPr lang="en-US"/>
-              <a:t>Second level</a:t>
-            </a:r>
-          </a:p>
-          <a:p>
-            <a:pPr lvl="2"/>
-            <a:r>
-              <a:rPr lang="en-US"/>
-              <a:t>Third level</a:t>
-            </a:r>
-          </a:p>
-          <a:p>
-            <a:pPr lvl="3"/>
-            <a:r>
-              <a:rPr lang="en-US"/>
-              <a:t>Fourth level</a:t>
-            </a:r>
-          </a:p>
-          <a:p>
-            <a:pPr lvl="4"/>
-            <a:r>
-              <a:rPr lang="en-US"/>
-              <a:t>Fifth level</a:t>
-            </a:r>
-          </a:p>
-        </p:txBody>
-      </p:sp>
-      <p:sp>
-        <p:nvSpPr>
-          <p:cNvPr id="6" name="Footer Placeholder 5"/>
-          <p:cNvSpPr>
-            <a:spLocks noGrp="1"/>
-          </p:cNvSpPr>
-          <p:nvPr>
-            <p:ph type="ftr" sz="quarter" idx="4"/>
-          </p:nvPr>
-        </p:nvSpPr>
-        <p:spPr>
-          <a:xfrm>
-            <a:off x="0" y="8685213"/>
-            <a:ext cx="2971800" cy="458787"/>
-          </a:xfrm>
-          <a:prstGeom prst="rect">
-            <a:avLst/>
-          </a:prstGeom>
-        </p:spPr>
-        <p:txBody>
-          <a:bodyPr vert="horz" lIns="91440" tIns="45720" rIns="91440" bIns="45720" rtlCol="0" anchor="b"/>
-          <a:lstStyle>
-            <a:lvl1pPr algn="l">
-              <a:defRPr sz="1200"/>
-            </a:lvl1pPr>
-          </a:lstStyle>
-          <a:p>
-            <a:endParaRPr lang="en-US"/>
-          </a:p>
-        </p:txBody>
-      </p:sp>
-      <p:sp>
-        <p:nvSpPr>
-          <p:cNvPr id="7" name="Slide Number Placeholder 6"/>
-          <p:cNvSpPr>
-            <a:spLocks noGrp="1"/>
-          </p:cNvSpPr>
-          <p:nvPr>
-            <p:ph type="sldNum" sz="quarter" idx="5"/>
-          </p:nvPr>
-        </p:nvSpPr>
-        <p:spPr>
-          <a:xfrm>
-            <a:off x="3884613" y="8685213"/>
-            <a:ext cx="2971800" cy="458787"/>
-          </a:xfrm>
-          <a:prstGeom prst="rect">
-            <a:avLst/>
-          </a:prstGeom>
-        </p:spPr>
-        <p:txBody>
-          <a:bodyPr vert="horz" lIns="91440" tIns="45720" rIns="91440" bIns="45720" rtlCol="0" anchor="b"/>
-          <a:lstStyle>
-            <a:lvl1pPr algn="r">
-              <a:defRPr sz="1200"/>
-            </a:lvl1pPr>
-          </a:lstStyle>
-          <a:p>
-            <a:fld id="{CE5E9CC1-C706-0F49-92D6-E571CC5EEA8F}" type="slidenum">
-              <a:rPr lang="en-US"/>
-              <a:t>‹#›</a:t>
-            </a:fld>
-            <a:endParaRPr lang="en-US"/>
-          </a:p>
-        </p:txBody>
-      </p:sp>
     </p:spTree>
     <p:extLst>
       <p:ext uri="{BB962C8B-B14F-4D97-AF65-F5344CB8AC3E}">
-        <p14:creationId xmlns:p14="http://schemas.microsoft.com/office/powerpoint/2010/main" val="1024086991"/>
+        <p14:creationId xmlns:p14="http://schemas.microsoft.com/office/powerpoint/2010/main" val="3139936386"/>
       </p:ext>
     </p:extLst>
   </p:cSld>
   <p:clrMap bg1="lt1" tx1="dk1" bg2="lt2" tx2="dk2" accent1="accent1" accent2="accent2" accent3="accent3" accent4="accent4" accent5="accent5" accent6="accent6" hlink="hlink" folHlink="folHlink"/>
   <p:notesStyle>
-    <a:lvl1pPr marL="0" algn="l" defTabSz="914400" rtl="0" eaLnBrk="1" latinLnBrk="0" hangingPunct="1">
+    <a:lvl1pPr marL="0" algn="l" defTabSz="914400" rtl="0" eaLnBrk="1" latinLnBrk="1" hangingPunct="1">
       <a:defRPr sz="1200" kern="1200">
         <a:solidFill>
           <a:schemeClr val="tx1"/>
@@ -386,7 +167,7 @@
         <a:cs typeface="+mn-cs"/>
       </a:defRPr>
     </a:lvl1pPr>
-    <a:lvl2pPr marL="457200" algn="l" defTabSz="914400" rtl="0" eaLnBrk="1" latinLnBrk="0" hangingPunct="1">
+    <a:lvl2pPr marL="457200" algn="l" defTabSz="914400" rtl="0" eaLnBrk="1" latinLnBrk="1" hangingPunct="1">
       <a:defRPr sz="1200" kern="1200">
         <a:solidFill>
           <a:schemeClr val="tx1"/>
@@ -396,7 +177,7 @@
         <a:cs typeface="+mn-cs"/>
       </a:defRPr>
     </a:lvl2pPr>
-    <a:lvl3pPr marL="914400" algn="l" defTabSz="914400" rtl="0" eaLnBrk="1" latinLnBrk="0" hangingPunct="1">
+    <a:lvl3pPr marL="914400" algn="l" defTabSz="914400" rtl="0" eaLnBrk="1" latinLnBrk="1" hangingPunct="1">
       <a:defRPr sz="1200" kern="1200">
         <a:solidFill>
           <a:schemeClr val="tx1"/>
@@ -406,7 +187,7 @@
         <a:cs typeface="+mn-cs"/>
       </a:defRPr>
     </a:lvl3pPr>
-    <a:lvl4pPr marL="1371600" algn="l" defTabSz="914400" rtl="0" eaLnBrk="1" latinLnBrk="0" hangingPunct="1">
+    <a:lvl4pPr marL="1371600" algn="l" defTabSz="914400" rtl="0" eaLnBrk="1" latinLnBrk="1" hangingPunct="1">
       <a:defRPr sz="1200" kern="1200">
         <a:solidFill>
           <a:schemeClr val="tx1"/>
@@ -416,7 +197,7 @@
         <a:cs typeface="+mn-cs"/>
       </a:defRPr>
     </a:lvl4pPr>
-    <a:lvl5pPr marL="1828800" algn="l" defTabSz="914400" rtl="0" eaLnBrk="1" latinLnBrk="0" hangingPunct="1">
+    <a:lvl5pPr marL="1828800" algn="l" defTabSz="914400" rtl="0" eaLnBrk="1" latinLnBrk="1" hangingPunct="1">
       <a:defRPr sz="1200" kern="1200">
         <a:solidFill>
           <a:schemeClr val="tx1"/>
@@ -426,7 +207,7 @@
         <a:cs typeface="+mn-cs"/>
       </a:defRPr>
     </a:lvl5pPr>
-    <a:lvl6pPr marL="2286000" algn="l" defTabSz="914400" rtl="0" eaLnBrk="1" latinLnBrk="0" hangingPunct="1">
+    <a:lvl6pPr marL="2286000" algn="l" defTabSz="914400" rtl="0" eaLnBrk="1" latinLnBrk="1" hangingPunct="1">
       <a:defRPr sz="1200" kern="1200">
         <a:solidFill>
           <a:schemeClr val="tx1"/>
@@ -436,7 +217,7 @@
         <a:cs typeface="+mn-cs"/>
       </a:defRPr>
     </a:lvl6pPr>
-    <a:lvl7pPr marL="2743200" algn="l" defTabSz="914400" rtl="0" eaLnBrk="1" latinLnBrk="0" hangingPunct="1">
+    <a:lvl7pPr marL="2743200" algn="l" defTabSz="914400" rtl="0" eaLnBrk="1" latinLnBrk="1" hangingPunct="1">
       <a:defRPr sz="1200" kern="1200">
         <a:solidFill>
           <a:schemeClr val="tx1"/>
@@ -446,7 +227,7 @@
         <a:cs typeface="+mn-cs"/>
       </a:defRPr>
     </a:lvl7pPr>
-    <a:lvl8pPr marL="3200400" algn="l" defTabSz="914400" rtl="0" eaLnBrk="1" latinLnBrk="0" hangingPunct="1">
+    <a:lvl8pPr marL="3200400" algn="l" defTabSz="914400" rtl="0" eaLnBrk="1" latinLnBrk="1" hangingPunct="1">
       <a:defRPr sz="1200" kern="1200">
         <a:solidFill>
           <a:schemeClr val="tx1"/>
@@ -456,7 +237,7 @@
         <a:cs typeface="+mn-cs"/>
       </a:defRPr>
     </a:lvl8pPr>
-    <a:lvl9pPr marL="3657600" algn="l" defTabSz="914400" rtl="0" eaLnBrk="1" latinLnBrk="0" hangingPunct="1">
+    <a:lvl9pPr marL="3657600" algn="l" defTabSz="914400" rtl="0" eaLnBrk="1" latinLnBrk="1" hangingPunct="1">
       <a:defRPr sz="1200" kern="1200">
         <a:solidFill>
           <a:schemeClr val="tx1"/>
@@ -514,10 +295,6 @@
           <a:bodyPr/>
           <a:lstStyle/>
           <a:p>
-            <a:r>
-              <a:rPr lang="en-US" dirty="0"/>
-              <a:t/>
-            </a:r>
             <a:endParaRPr lang="en-US" dirty="0"/>
           </a:p>
         </p:txBody>
@@ -602,10 +379,6 @@
           <a:bodyPr/>
           <a:lstStyle/>
           <a:p>
-            <a:r>
-              <a:rPr lang="en-US" dirty="0"/>
-              <a:t/>
-            </a:r>
             <a:endParaRPr lang="en-US" dirty="0"/>
           </a:p>
         </p:txBody>
@@ -690,10 +463,6 @@
           <a:bodyPr/>
           <a:lstStyle/>
           <a:p>
-            <a:r>
-              <a:rPr lang="en-US" dirty="0"/>
-              <a:t/>
-            </a:r>
             <a:endParaRPr lang="en-US" dirty="0"/>
           </a:p>
         </p:txBody>
@@ -778,10 +547,6 @@
           <a:bodyPr/>
           <a:lstStyle/>
           <a:p>
-            <a:r>
-              <a:rPr lang="en-US" dirty="0"/>
-              <a:t/>
-            </a:r>
             <a:endParaRPr lang="en-US" dirty="0"/>
           </a:p>
         </p:txBody>
@@ -866,10 +631,6 @@
           <a:bodyPr/>
           <a:lstStyle/>
           <a:p>
-            <a:r>
-              <a:rPr lang="en-US" dirty="0"/>
-              <a:t/>
-            </a:r>
             <a:endParaRPr lang="en-US" dirty="0"/>
           </a:p>
         </p:txBody>
@@ -954,10 +715,6 @@
           <a:bodyPr/>
           <a:lstStyle/>
           <a:p>
-            <a:r>
-              <a:rPr lang="en-US" dirty="0"/>
-              <a:t/>
-            </a:r>
             <a:endParaRPr lang="en-US" dirty="0"/>
           </a:p>
         </p:txBody>
@@ -1042,10 +799,6 @@
           <a:bodyPr/>
           <a:lstStyle/>
           <a:p>
-            <a:r>
-              <a:rPr lang="en-US" dirty="0"/>
-              <a:t/>
-            </a:r>
             <a:endParaRPr lang="en-US" dirty="0"/>
           </a:p>
         </p:txBody>
@@ -1130,10 +883,6 @@
           <a:bodyPr/>
           <a:lstStyle/>
           <a:p>
-            <a:r>
-              <a:rPr lang="en-US" dirty="0"/>
-              <a:t/>
-            </a:r>
             <a:endParaRPr lang="en-US" dirty="0"/>
           </a:p>
         </p:txBody>
@@ -1218,10 +967,6 @@
           <a:bodyPr/>
           <a:lstStyle/>
           <a:p>
-            <a:r>
-              <a:rPr lang="en-US" dirty="0"/>
-              <a:t/>
-            </a:r>
             <a:endParaRPr lang="en-US" dirty="0"/>
           </a:p>
         </p:txBody>
@@ -1306,10 +1051,6 @@
           <a:bodyPr/>
           <a:lstStyle/>
           <a:p>
-            <a:r>
-              <a:rPr lang="en-US" dirty="0"/>
-              <a:t/>
-            </a:r>
             <a:endParaRPr lang="en-US" dirty="0"/>
           </a:p>
         </p:txBody>
@@ -1394,10 +1135,6 @@
           <a:bodyPr/>
           <a:lstStyle/>
           <a:p>
-            <a:r>
-              <a:rPr lang="en-US" dirty="0"/>
-              <a:t/>
-            </a:r>
             <a:endParaRPr lang="en-US" dirty="0"/>
           </a:p>
         </p:txBody>
@@ -1482,10 +1219,6 @@
           <a:bodyPr/>
           <a:lstStyle/>
           <a:p>
-            <a:r>
-              <a:rPr lang="en-US" dirty="0"/>
-              <a:t/>
-            </a:r>
             <a:endParaRPr lang="en-US" dirty="0"/>
           </a:p>
         </p:txBody>
@@ -1570,10 +1303,6 @@
           <a:bodyPr/>
           <a:lstStyle/>
           <a:p>
-            <a:r>
-              <a:rPr lang="en-US" dirty="0"/>
-              <a:t/>
-            </a:r>
             <a:endParaRPr lang="en-US" dirty="0"/>
           </a:p>
         </p:txBody>
@@ -1658,10 +1387,6 @@
           <a:bodyPr/>
           <a:lstStyle/>
           <a:p>
-            <a:r>
-              <a:rPr lang="en-US" dirty="0"/>
-              <a:t/>
-            </a:r>
             <a:endParaRPr lang="en-US" dirty="0"/>
           </a:p>
         </p:txBody>
@@ -1746,10 +1471,6 @@
           <a:bodyPr/>
           <a:lstStyle/>
           <a:p>
-            <a:r>
-              <a:rPr lang="en-US" dirty="0"/>
-              <a:t/>
-            </a:r>
             <a:endParaRPr lang="en-US" dirty="0"/>
           </a:p>
         </p:txBody>
@@ -1823,6 +1544,11 @@
 <file path=ppt/slideMasters/slideMaster1.xml><?xml version="1.0" encoding="utf-8"?>
 <p:sldMaster xmlns:a="http://schemas.openxmlformats.org/drawingml/2006/main" xmlns:r="http://schemas.openxmlformats.org/officeDocument/2006/relationships" xmlns:p="http://schemas.openxmlformats.org/presentationml/2006/main">
   <p:cSld>
+    <p:bg>
+      <p:bgRef idx="1001">
+        <a:schemeClr val="bg1"/>
+      </p:bgRef>
+    </p:bg>
     <p:spTree>
       <p:nvGrpSpPr>
         <p:cNvPr id="1" name=""/>
@@ -2195,7 +1921,7 @@
           <a:bodyPr wrap="square" rtlCol="0" anchor="ctr"/>
           <a:lstStyle/>
           <a:p>
-            <a:pPr indent="0" marL="0">
+            <a:pPr marL="0" indent="0">
               <a:buNone/>
             </a:pPr>
             <a:r>
@@ -2234,7 +1960,7 @@
           <a:bodyPr wrap="square" rtlCol="0" anchor="ctr"/>
           <a:lstStyle/>
           <a:p>
-            <a:pPr indent="0" marL="0">
+            <a:pPr marL="0" indent="0">
               <a:buNone/>
             </a:pPr>
             <a:r>
@@ -2273,7 +1999,7 @@
           <a:bodyPr wrap="square" rtlCol="0" anchor="ctr"/>
           <a:lstStyle/>
           <a:p>
-            <a:pPr indent="0" marL="0">
+            <a:pPr marL="0" indent="0">
               <a:buNone/>
             </a:pPr>
             <a:r>
@@ -2312,7 +2038,7 @@
           <a:bodyPr wrap="square" rtlCol="0" anchor="ctr"/>
           <a:lstStyle/>
           <a:p>
-            <a:pPr algn="r" indent="0" marL="0">
+            <a:pPr marL="0" indent="0" algn="r">
               <a:buNone/>
             </a:pPr>
             <a:r>
@@ -2324,7 +2050,18 @@
                 <a:ea typeface="Calibri" pitchFamily="34" charset="-122"/>
                 <a:cs typeface="Calibri" pitchFamily="34" charset="-120"/>
               </a:rPr>
-              <a:t>팀명 :  White Dog</a:t>
+              <a:t>팀명 :  </a:t>
+            </a:r>
+            <a:r>
+              <a:rPr lang="ko-KR" altLang="en-US" sz="1300" b="1" dirty="0">
+                <a:solidFill>
+                  <a:srgbClr val="0099CC"/>
+                </a:solidFill>
+                <a:latin typeface="Calibri" pitchFamily="34" charset="0"/>
+                <a:ea typeface="Calibri" pitchFamily="34" charset="-122"/>
+                <a:cs typeface="Calibri" pitchFamily="34" charset="-120"/>
+              </a:rPr>
+              <a:t>비밀병기</a:t>
             </a:r>
             <a:endParaRPr lang="en-US" sz="1300" dirty="0"/>
           </a:p>
@@ -2351,7 +2088,7 @@
           <a:bodyPr wrap="square" rtlCol="0" anchor="ctr"/>
           <a:lstStyle/>
           <a:p>
-            <a:pPr algn="r" indent="0" marL="0">
+            <a:pPr marL="0" indent="0" algn="r">
               <a:buNone/>
             </a:pPr>
             <a:r>
@@ -2390,7 +2127,7 @@
           <a:bodyPr wrap="square" rtlCol="0" anchor="ctr"/>
           <a:lstStyle/>
           <a:p>
-            <a:pPr indent="0" marL="0">
+            <a:pPr marL="0" indent="0">
               <a:buNone/>
             </a:pPr>
             <a:r>
@@ -2424,6 +2161,7 @@
         <a:solidFill>
           <a:srgbClr val="FFFFFF"/>
         </a:solidFill>
+        <a:effectLst/>
       </p:bgPr>
     </p:bg>
     <p:spTree>
@@ -2481,7 +2219,7 @@
           <a:bodyPr wrap="square" rtlCol="0" anchor="ctr"/>
           <a:lstStyle/>
           <a:p>
-            <a:pPr indent="0" marL="0">
+            <a:pPr marL="0" indent="0">
               <a:buNone/>
             </a:pPr>
             <a:r>
@@ -2520,7 +2258,7 @@
           <a:bodyPr wrap="square" rtlCol="0" anchor="ctr"/>
           <a:lstStyle/>
           <a:p>
-            <a:pPr indent="0" marL="0">
+            <a:pPr marL="0" indent="0">
               <a:buNone/>
             </a:pPr>
             <a:r>
@@ -2584,7 +2322,7 @@
           <a:bodyPr wrap="square" rtlCol="0" anchor="ctr"/>
           <a:lstStyle/>
           <a:p>
-            <a:pPr indent="0" marL="0">
+            <a:pPr marL="0" indent="0">
               <a:buNone/>
             </a:pPr>
             <a:r>
@@ -2623,7 +2361,7 @@
           <a:bodyPr wrap="square" rtlCol="0" anchor="ctr"/>
           <a:lstStyle/>
           <a:p>
-            <a:pPr indent="0" marL="0">
+            <a:pPr marL="0" indent="0">
               <a:buNone/>
             </a:pPr>
             <a:r>
@@ -2662,7 +2400,7 @@
           <a:bodyPr wrap="square" rtlCol="0" anchor="ctr"/>
           <a:lstStyle/>
           <a:p>
-            <a:pPr indent="0" marL="0">
+            <a:pPr marL="0" indent="0">
               <a:buNone/>
             </a:pPr>
             <a:r>
@@ -2701,7 +2439,7 @@
           <a:bodyPr wrap="square" rtlCol="0" anchor="ctr"/>
           <a:lstStyle/>
           <a:p>
-            <a:pPr indent="0" marL="0">
+            <a:pPr marL="0" indent="0">
               <a:buNone/>
             </a:pPr>
             <a:r>
@@ -2740,7 +2478,7 @@
           <a:bodyPr wrap="square" rtlCol="0" anchor="ctr"/>
           <a:lstStyle/>
           <a:p>
-            <a:pPr indent="0" marL="0">
+            <a:pPr marL="0" indent="0">
               <a:buNone/>
             </a:pPr>
             <a:r>
@@ -2779,7 +2517,7 @@
           <a:bodyPr wrap="square" rtlCol="0" anchor="ctr"/>
           <a:lstStyle/>
           <a:p>
-            <a:pPr indent="0" marL="0">
+            <a:pPr marL="0" indent="0">
               <a:buNone/>
             </a:pPr>
             <a:r>
@@ -2818,7 +2556,7 @@
           <a:bodyPr wrap="square" rtlCol="0" anchor="ctr"/>
           <a:lstStyle/>
           <a:p>
-            <a:pPr indent="0" marL="0">
+            <a:pPr marL="0" indent="0">
               <a:buNone/>
             </a:pPr>
             <a:r>
@@ -2857,7 +2595,7 @@
           <a:bodyPr wrap="square" rtlCol="0" anchor="ctr"/>
           <a:lstStyle/>
           <a:p>
-            <a:pPr indent="0" marL="0">
+            <a:pPr marL="0" indent="0">
               <a:buNone/>
             </a:pPr>
             <a:r>
@@ -2874,7 +2612,7 @@
             <a:endParaRPr lang="en-US" sz="750" dirty="0"/>
           </a:p>
           <a:p>
-            <a:pPr indent="0" marL="0">
+            <a:pPr marL="0" indent="0">
               <a:buNone/>
             </a:pPr>
             <a:r>
@@ -2891,7 +2629,7 @@
             <a:endParaRPr lang="en-US" sz="750" dirty="0"/>
           </a:p>
           <a:p>
-            <a:pPr indent="0" marL="0">
+            <a:pPr marL="0" indent="0">
               <a:buNone/>
             </a:pPr>
             <a:r>
@@ -2950,7 +2688,7 @@
           <a:bodyPr wrap="square" rtlCol="0" anchor="ctr"/>
           <a:lstStyle/>
           <a:p>
-            <a:pPr indent="0" marL="0">
+            <a:pPr marL="0" indent="0">
               <a:buNone/>
             </a:pPr>
             <a:r>
@@ -2992,7 +2730,7 @@
             <a:prstDash val="solid"/>
           </a:ln>
           <a:effectLst>
-            <a:outerShdw sx="100000" sy="100000" kx="0" ky="0" algn="bl" rotWithShape="0" blurRad="63500" dist="25400" dir="8100000">
+            <a:outerShdw blurRad="63500" dist="25400" dir="8100000" algn="bl" rotWithShape="0">
               <a:srgbClr val="000000">
                 <a:alpha val="12000"/>
               </a:srgbClr>
@@ -3041,7 +2779,7 @@
           <a:bodyPr wrap="square" rtlCol="0" anchor="ctr"/>
           <a:lstStyle/>
           <a:p>
-            <a:pPr indent="0" marL="0">
+            <a:pPr marL="0" indent="0">
               <a:buNone/>
             </a:pPr>
             <a:r>
@@ -3080,7 +2818,7 @@
           <a:bodyPr wrap="square" rtlCol="0" anchor="ctr"/>
           <a:lstStyle/>
           <a:p>
-            <a:pPr indent="0" marL="0">
+            <a:pPr marL="0" indent="0">
               <a:buNone/>
             </a:pPr>
             <a:r>
@@ -3119,7 +2857,7 @@
           <a:bodyPr wrap="square" rtlCol="0" anchor="ctr"/>
           <a:lstStyle/>
           <a:p>
-            <a:pPr indent="0" marL="0">
+            <a:pPr marL="0" indent="0">
               <a:buNone/>
             </a:pPr>
             <a:r>
@@ -3158,7 +2896,7 @@
           <a:bodyPr wrap="square" rtlCol="0" anchor="ctr"/>
           <a:lstStyle/>
           <a:p>
-            <a:pPr indent="0" marL="0">
+            <a:pPr marL="0" indent="0">
               <a:buNone/>
             </a:pPr>
             <a:r>
@@ -3197,7 +2935,7 @@
           <a:bodyPr wrap="square" rtlCol="0" anchor="ctr"/>
           <a:lstStyle/>
           <a:p>
-            <a:pPr indent="0" marL="0">
+            <a:pPr marL="0" indent="0">
               <a:buNone/>
             </a:pPr>
             <a:r>
@@ -3236,7 +2974,7 @@
           <a:bodyPr wrap="square" rtlCol="0" anchor="ctr"/>
           <a:lstStyle/>
           <a:p>
-            <a:pPr indent="0" marL="0">
+            <a:pPr marL="0" indent="0">
               <a:buNone/>
             </a:pPr>
             <a:r>
@@ -3275,7 +3013,7 @@
           <a:bodyPr wrap="square" rtlCol="0" anchor="ctr"/>
           <a:lstStyle/>
           <a:p>
-            <a:pPr indent="0" marL="0">
+            <a:pPr marL="0" indent="0">
               <a:buNone/>
             </a:pPr>
             <a:r>
@@ -3314,7 +3052,7 @@
           <a:bodyPr wrap="square" rtlCol="0" anchor="ctr"/>
           <a:lstStyle/>
           <a:p>
-            <a:pPr indent="0" marL="0">
+            <a:pPr marL="0" indent="0">
               <a:buNone/>
             </a:pPr>
             <a:r>
@@ -3353,7 +3091,7 @@
           <a:bodyPr wrap="square" rtlCol="0" anchor="ctr"/>
           <a:lstStyle/>
           <a:p>
-            <a:pPr indent="0" marL="0">
+            <a:pPr marL="0" indent="0">
               <a:buNone/>
             </a:pPr>
             <a:r>
@@ -3392,7 +3130,7 @@
           <a:bodyPr wrap="square" rtlCol="0" anchor="ctr"/>
           <a:lstStyle/>
           <a:p>
-            <a:pPr indent="0" marL="0">
+            <a:pPr marL="0" indent="0">
               <a:buNone/>
             </a:pPr>
             <a:r>
@@ -3431,7 +3169,7 @@
           <a:bodyPr wrap="square" rtlCol="0" anchor="ctr"/>
           <a:lstStyle/>
           <a:p>
-            <a:pPr indent="0" marL="0">
+            <a:pPr marL="0" indent="0">
               <a:buNone/>
             </a:pPr>
             <a:r>
@@ -3470,7 +3208,7 @@
           <a:bodyPr wrap="square" rtlCol="0" anchor="ctr"/>
           <a:lstStyle/>
           <a:p>
-            <a:pPr indent="0" marL="0">
+            <a:pPr marL="0" indent="0">
               <a:buNone/>
             </a:pPr>
             <a:r>
@@ -3529,7 +3267,7 @@
           <a:bodyPr wrap="square" rtlCol="0" anchor="ctr"/>
           <a:lstStyle/>
           <a:p>
-            <a:pPr indent="0" marL="0">
+            <a:pPr marL="0" indent="0">
               <a:buNone/>
             </a:pPr>
             <a:r>
@@ -3568,7 +3306,7 @@
           <a:bodyPr wrap="square" rtlCol="0" anchor="ctr"/>
           <a:lstStyle/>
           <a:p>
-            <a:pPr indent="0" marL="0">
+            <a:pPr marL="0" indent="0">
               <a:buNone/>
             </a:pPr>
             <a:r>
@@ -3585,7 +3323,7 @@
             <a:endParaRPr lang="en-US" sz="800" dirty="0"/>
           </a:p>
           <a:p>
-            <a:pPr indent="0" marL="0">
+            <a:pPr marL="0" indent="0">
               <a:buNone/>
             </a:pPr>
             <a:r>
@@ -3602,7 +3340,7 @@
             <a:endParaRPr lang="en-US" sz="800" dirty="0"/>
           </a:p>
           <a:p>
-            <a:pPr indent="0" marL="0">
+            <a:pPr marL="0" indent="0">
               <a:buNone/>
             </a:pPr>
             <a:r>
@@ -3619,7 +3357,7 @@
             <a:endParaRPr lang="en-US" sz="800" dirty="0"/>
           </a:p>
           <a:p>
-            <a:pPr indent="0" marL="0">
+            <a:pPr marL="0" indent="0">
               <a:buNone/>
             </a:pPr>
             <a:r>
@@ -3658,7 +3396,7 @@
           <a:bodyPr wrap="square" rtlCol="0" anchor="ctr"/>
           <a:lstStyle/>
           <a:p>
-            <a:pPr indent="0" marL="0">
+            <a:pPr marL="0" indent="0">
               <a:buNone/>
             </a:pPr>
             <a:r>
@@ -3675,7 +3413,7 @@
             <a:endParaRPr lang="en-US" sz="800" dirty="0"/>
           </a:p>
           <a:p>
-            <a:pPr indent="0" marL="0">
+            <a:pPr marL="0" indent="0">
               <a:buNone/>
             </a:pPr>
             <a:r>
@@ -3692,7 +3430,7 @@
             <a:endParaRPr lang="en-US" sz="800" dirty="0"/>
           </a:p>
           <a:p>
-            <a:pPr indent="0" marL="0">
+            <a:pPr marL="0" indent="0">
               <a:buNone/>
             </a:pPr>
             <a:r>
@@ -3726,6 +3464,7 @@
         <a:solidFill>
           <a:srgbClr val="FFFFFF"/>
         </a:solidFill>
+        <a:effectLst/>
       </p:bgPr>
     </p:bg>
     <p:spTree>
@@ -3783,7 +3522,7 @@
           <a:bodyPr wrap="square" rtlCol="0" anchor="ctr"/>
           <a:lstStyle/>
           <a:p>
-            <a:pPr indent="0" marL="0">
+            <a:pPr marL="0" indent="0">
               <a:buNone/>
             </a:pPr>
             <a:r>
@@ -3822,7 +3561,7 @@
           <a:bodyPr wrap="square" rtlCol="0" anchor="ctr"/>
           <a:lstStyle/>
           <a:p>
-            <a:pPr indent="0" marL="0">
+            <a:pPr marL="0" indent="0">
               <a:buNone/>
             </a:pPr>
             <a:r>
@@ -3886,7 +3625,7 @@
           <a:bodyPr wrap="square" rtlCol="0" anchor="ctr"/>
           <a:lstStyle/>
           <a:p>
-            <a:pPr indent="0" marL="0">
+            <a:pPr marL="0" indent="0">
               <a:buNone/>
             </a:pPr>
             <a:r>
@@ -3925,7 +3664,7 @@
           <a:bodyPr wrap="square" rtlCol="0" anchor="ctr"/>
           <a:lstStyle/>
           <a:p>
-            <a:pPr indent="0" marL="0">
+            <a:pPr marL="0" indent="0">
               <a:buNone/>
             </a:pPr>
             <a:r>
@@ -3964,7 +3703,7 @@
           <a:bodyPr wrap="square" rtlCol="0" anchor="ctr"/>
           <a:lstStyle/>
           <a:p>
-            <a:pPr indent="0" marL="0">
+            <a:pPr marL="0" indent="0">
               <a:buNone/>
             </a:pPr>
             <a:r>
@@ -4003,7 +3742,7 @@
           <a:bodyPr wrap="square" rtlCol="0" anchor="ctr"/>
           <a:lstStyle/>
           <a:p>
-            <a:pPr indent="0" marL="0">
+            <a:pPr marL="0" indent="0">
               <a:buNone/>
             </a:pPr>
             <a:r>
@@ -4042,7 +3781,7 @@
           <a:bodyPr wrap="square" rtlCol="0" anchor="ctr"/>
           <a:lstStyle/>
           <a:p>
-            <a:pPr indent="0" marL="0">
+            <a:pPr marL="0" indent="0">
               <a:buNone/>
             </a:pPr>
             <a:r>
@@ -4081,7 +3820,7 @@
           <a:bodyPr wrap="square" rtlCol="0" anchor="ctr"/>
           <a:lstStyle/>
           <a:p>
-            <a:pPr indent="0" marL="0">
+            <a:pPr marL="0" indent="0">
               <a:buNone/>
             </a:pPr>
             <a:r>
@@ -4120,7 +3859,7 @@
           <a:bodyPr wrap="square" rtlCol="0" anchor="ctr"/>
           <a:lstStyle/>
           <a:p>
-            <a:pPr indent="0" marL="0">
+            <a:pPr marL="0" indent="0">
               <a:buNone/>
             </a:pPr>
             <a:r>
@@ -4159,7 +3898,7 @@
           <a:bodyPr wrap="square" rtlCol="0" anchor="ctr"/>
           <a:lstStyle/>
           <a:p>
-            <a:pPr indent="0" marL="0">
+            <a:pPr marL="0" indent="0">
               <a:buNone/>
             </a:pPr>
             <a:r>
@@ -4176,7 +3915,7 @@
             <a:endParaRPr lang="en-US" sz="750" dirty="0"/>
           </a:p>
           <a:p>
-            <a:pPr indent="0" marL="0">
+            <a:pPr marL="0" indent="0">
               <a:buNone/>
             </a:pPr>
             <a:r>
@@ -4193,7 +3932,7 @@
             <a:endParaRPr lang="en-US" sz="750" dirty="0"/>
           </a:p>
           <a:p>
-            <a:pPr indent="0" marL="0">
+            <a:pPr marL="0" indent="0">
               <a:buNone/>
             </a:pPr>
             <a:r>
@@ -4210,7 +3949,7 @@
             <a:endParaRPr lang="en-US" sz="750" dirty="0"/>
           </a:p>
           <a:p>
-            <a:pPr indent="0" marL="0">
+            <a:pPr marL="0" indent="0">
               <a:buNone/>
             </a:pPr>
             <a:r>
@@ -4269,7 +4008,7 @@
           <a:bodyPr wrap="square" rtlCol="0" anchor="ctr"/>
           <a:lstStyle/>
           <a:p>
-            <a:pPr indent="0" marL="0">
+            <a:pPr marL="0" indent="0">
               <a:buNone/>
             </a:pPr>
             <a:r>
@@ -4311,7 +4050,7 @@
             <a:prstDash val="solid"/>
           </a:ln>
           <a:effectLst>
-            <a:outerShdw sx="100000" sy="100000" kx="0" ky="0" algn="bl" rotWithShape="0" blurRad="63500" dist="25400" dir="8100000">
+            <a:outerShdw blurRad="63500" dist="25400" dir="8100000" algn="bl" rotWithShape="0">
               <a:srgbClr val="000000">
                 <a:alpha val="12000"/>
               </a:srgbClr>
@@ -4360,7 +4099,7 @@
           <a:bodyPr wrap="square" rtlCol="0" anchor="ctr"/>
           <a:lstStyle/>
           <a:p>
-            <a:pPr indent="0" marL="0">
+            <a:pPr marL="0" indent="0">
               <a:buNone/>
             </a:pPr>
             <a:r>
@@ -4399,7 +4138,7 @@
           <a:bodyPr wrap="square" rtlCol="0" anchor="ctr"/>
           <a:lstStyle/>
           <a:p>
-            <a:pPr indent="0" marL="0">
+            <a:pPr marL="0" indent="0">
               <a:buNone/>
             </a:pPr>
             <a:r>
@@ -4438,7 +4177,7 @@
           <a:bodyPr wrap="square" rtlCol="0" anchor="ctr"/>
           <a:lstStyle/>
           <a:p>
-            <a:pPr indent="0" marL="0">
+            <a:pPr marL="0" indent="0">
               <a:buNone/>
             </a:pPr>
             <a:r>
@@ -4477,7 +4216,7 @@
           <a:bodyPr wrap="square" rtlCol="0" anchor="ctr"/>
           <a:lstStyle/>
           <a:p>
-            <a:pPr indent="0" marL="0">
+            <a:pPr marL="0" indent="0">
               <a:buNone/>
             </a:pPr>
             <a:r>
@@ -4516,7 +4255,7 @@
           <a:bodyPr wrap="square" rtlCol="0" anchor="ctr"/>
           <a:lstStyle/>
           <a:p>
-            <a:pPr indent="0" marL="0">
+            <a:pPr marL="0" indent="0">
               <a:buNone/>
             </a:pPr>
             <a:r>
@@ -4555,7 +4294,7 @@
           <a:bodyPr wrap="square" rtlCol="0" anchor="ctr"/>
           <a:lstStyle/>
           <a:p>
-            <a:pPr indent="0" marL="0">
+            <a:pPr marL="0" indent="0">
               <a:buNone/>
             </a:pPr>
             <a:r>
@@ -4594,7 +4333,7 @@
           <a:bodyPr wrap="square" rtlCol="0" anchor="ctr"/>
           <a:lstStyle/>
           <a:p>
-            <a:pPr indent="0" marL="0">
+            <a:pPr marL="0" indent="0">
               <a:buNone/>
             </a:pPr>
             <a:r>
@@ -4633,7 +4372,7 @@
           <a:bodyPr wrap="square" rtlCol="0" anchor="ctr"/>
           <a:lstStyle/>
           <a:p>
-            <a:pPr indent="0" marL="0">
+            <a:pPr marL="0" indent="0">
               <a:buNone/>
             </a:pPr>
             <a:r>
@@ -4672,7 +4411,7 @@
           <a:bodyPr wrap="square" rtlCol="0" anchor="ctr"/>
           <a:lstStyle/>
           <a:p>
-            <a:pPr indent="0" marL="0">
+            <a:pPr marL="0" indent="0">
               <a:buNone/>
             </a:pPr>
             <a:r>
@@ -4711,7 +4450,7 @@
           <a:bodyPr wrap="square" rtlCol="0" anchor="ctr"/>
           <a:lstStyle/>
           <a:p>
-            <a:pPr indent="0" marL="0">
+            <a:pPr marL="0" indent="0">
               <a:buNone/>
             </a:pPr>
             <a:r>
@@ -4770,7 +4509,7 @@
           <a:bodyPr wrap="square" rtlCol="0" anchor="ctr"/>
           <a:lstStyle/>
           <a:p>
-            <a:pPr indent="0" marL="0">
+            <a:pPr marL="0" indent="0">
               <a:buNone/>
             </a:pPr>
             <a:r>
@@ -4809,7 +4548,7 @@
           <a:bodyPr wrap="square" rtlCol="0" anchor="ctr"/>
           <a:lstStyle/>
           <a:p>
-            <a:pPr indent="0" marL="0">
+            <a:pPr marL="0" indent="0">
               <a:buNone/>
             </a:pPr>
             <a:r>
@@ -4826,7 +4565,7 @@
             <a:endParaRPr lang="en-US" sz="800" dirty="0"/>
           </a:p>
           <a:p>
-            <a:pPr indent="0" marL="0">
+            <a:pPr marL="0" indent="0">
               <a:buNone/>
             </a:pPr>
             <a:r>
@@ -4843,7 +4582,7 @@
             <a:endParaRPr lang="en-US" sz="800" dirty="0"/>
           </a:p>
           <a:p>
-            <a:pPr indent="0" marL="0">
+            <a:pPr marL="0" indent="0">
               <a:buNone/>
             </a:pPr>
             <a:r>
@@ -4860,7 +4599,7 @@
             <a:endParaRPr lang="en-US" sz="800" dirty="0"/>
           </a:p>
           <a:p>
-            <a:pPr indent="0" marL="0">
+            <a:pPr marL="0" indent="0">
               <a:buNone/>
             </a:pPr>
             <a:r>
@@ -4899,7 +4638,7 @@
           <a:bodyPr wrap="square" rtlCol="0" anchor="ctr"/>
           <a:lstStyle/>
           <a:p>
-            <a:pPr indent="0" marL="0">
+            <a:pPr marL="0" indent="0">
               <a:buNone/>
             </a:pPr>
             <a:r>
@@ -4916,7 +4655,7 @@
             <a:endParaRPr lang="en-US" sz="800" dirty="0"/>
           </a:p>
           <a:p>
-            <a:pPr indent="0" marL="0">
+            <a:pPr marL="0" indent="0">
               <a:buNone/>
             </a:pPr>
             <a:r>
@@ -4933,7 +4672,7 @@
             <a:endParaRPr lang="en-US" sz="800" dirty="0"/>
           </a:p>
           <a:p>
-            <a:pPr indent="0" marL="0">
+            <a:pPr marL="0" indent="0">
               <a:buNone/>
             </a:pPr>
             <a:r>
@@ -4967,6 +4706,7 @@
         <a:solidFill>
           <a:srgbClr val="FFFFFF"/>
         </a:solidFill>
+        <a:effectLst/>
       </p:bgPr>
     </p:bg>
     <p:spTree>
@@ -5024,7 +4764,7 @@
           <a:bodyPr wrap="square" rtlCol="0" anchor="ctr"/>
           <a:lstStyle/>
           <a:p>
-            <a:pPr indent="0" marL="0">
+            <a:pPr marL="0" indent="0">
               <a:buNone/>
             </a:pPr>
             <a:r>
@@ -5063,7 +4803,7 @@
           <a:bodyPr wrap="square" rtlCol="0" anchor="ctr"/>
           <a:lstStyle/>
           <a:p>
-            <a:pPr indent="0" marL="0">
+            <a:pPr marL="0" indent="0">
               <a:buNone/>
             </a:pPr>
             <a:r>
@@ -5127,7 +4867,7 @@
           <a:bodyPr wrap="square" rtlCol="0" anchor="ctr"/>
           <a:lstStyle/>
           <a:p>
-            <a:pPr indent="0" marL="0">
+            <a:pPr marL="0" indent="0">
               <a:buNone/>
             </a:pPr>
             <a:r>
@@ -5166,7 +4906,7 @@
           <a:bodyPr wrap="square" rtlCol="0" anchor="ctr"/>
           <a:lstStyle/>
           <a:p>
-            <a:pPr indent="0" marL="0">
+            <a:pPr marL="0" indent="0">
               <a:buNone/>
             </a:pPr>
             <a:r>
@@ -5205,7 +4945,7 @@
           <a:bodyPr wrap="square" rtlCol="0" anchor="ctr"/>
           <a:lstStyle/>
           <a:p>
-            <a:pPr indent="0" marL="0">
+            <a:pPr marL="0" indent="0">
               <a:buNone/>
             </a:pPr>
             <a:r>
@@ -5244,7 +4984,7 @@
           <a:bodyPr wrap="square" rtlCol="0" anchor="ctr"/>
           <a:lstStyle/>
           <a:p>
-            <a:pPr indent="0" marL="0">
+            <a:pPr marL="0" indent="0">
               <a:buNone/>
             </a:pPr>
             <a:r>
@@ -5283,7 +5023,7 @@
           <a:bodyPr wrap="square" rtlCol="0" anchor="ctr"/>
           <a:lstStyle/>
           <a:p>
-            <a:pPr indent="0" marL="0">
+            <a:pPr marL="0" indent="0">
               <a:buNone/>
             </a:pPr>
             <a:r>
@@ -5322,7 +5062,7 @@
           <a:bodyPr wrap="square" rtlCol="0" anchor="ctr"/>
           <a:lstStyle/>
           <a:p>
-            <a:pPr indent="0" marL="0">
+            <a:pPr marL="0" indent="0">
               <a:buNone/>
             </a:pPr>
             <a:r>
@@ -5361,7 +5101,7 @@
           <a:bodyPr wrap="square" rtlCol="0" anchor="ctr"/>
           <a:lstStyle/>
           <a:p>
-            <a:pPr indent="0" marL="0">
+            <a:pPr marL="0" indent="0">
               <a:buNone/>
             </a:pPr>
             <a:r>
@@ -5400,7 +5140,7 @@
           <a:bodyPr wrap="square" rtlCol="0" anchor="ctr"/>
           <a:lstStyle/>
           <a:p>
-            <a:pPr indent="0" marL="0">
+            <a:pPr marL="0" indent="0">
               <a:buNone/>
             </a:pPr>
             <a:r>
@@ -5417,7 +5157,7 @@
             <a:endParaRPr lang="en-US" sz="750" dirty="0"/>
           </a:p>
           <a:p>
-            <a:pPr indent="0" marL="0">
+            <a:pPr marL="0" indent="0">
               <a:buNone/>
             </a:pPr>
             <a:r>
@@ -5434,7 +5174,7 @@
             <a:endParaRPr lang="en-US" sz="750" dirty="0"/>
           </a:p>
           <a:p>
-            <a:pPr indent="0" marL="0">
+            <a:pPr marL="0" indent="0">
               <a:buNone/>
             </a:pPr>
             <a:r>
@@ -5451,7 +5191,7 @@
             <a:endParaRPr lang="en-US" sz="750" dirty="0"/>
           </a:p>
           <a:p>
-            <a:pPr indent="0" marL="0">
+            <a:pPr marL="0" indent="0">
               <a:buNone/>
             </a:pPr>
             <a:r>
@@ -5510,7 +5250,7 @@
           <a:bodyPr wrap="square" rtlCol="0" anchor="ctr"/>
           <a:lstStyle/>
           <a:p>
-            <a:pPr indent="0" marL="0">
+            <a:pPr marL="0" indent="0">
               <a:buNone/>
             </a:pPr>
             <a:r>
@@ -5552,7 +5292,7 @@
             <a:prstDash val="solid"/>
           </a:ln>
           <a:effectLst>
-            <a:outerShdw sx="100000" sy="100000" kx="0" ky="0" algn="bl" rotWithShape="0" blurRad="63500" dist="25400" dir="8100000">
+            <a:outerShdw blurRad="63500" dist="25400" dir="8100000" algn="bl" rotWithShape="0">
               <a:srgbClr val="000000">
                 <a:alpha val="12000"/>
               </a:srgbClr>
@@ -5601,7 +5341,7 @@
           <a:bodyPr wrap="square" rtlCol="0" anchor="ctr"/>
           <a:lstStyle/>
           <a:p>
-            <a:pPr indent="0" marL="0">
+            <a:pPr marL="0" indent="0">
               <a:buNone/>
             </a:pPr>
             <a:r>
@@ -5640,7 +5380,7 @@
           <a:bodyPr wrap="square" rtlCol="0" anchor="ctr"/>
           <a:lstStyle/>
           <a:p>
-            <a:pPr indent="0" marL="0">
+            <a:pPr marL="0" indent="0">
               <a:buNone/>
             </a:pPr>
             <a:r>
@@ -5679,7 +5419,7 @@
           <a:bodyPr wrap="square" rtlCol="0" anchor="ctr"/>
           <a:lstStyle/>
           <a:p>
-            <a:pPr indent="0" marL="0">
+            <a:pPr marL="0" indent="0">
               <a:buNone/>
             </a:pPr>
             <a:r>
@@ -5718,7 +5458,7 @@
           <a:bodyPr wrap="square" rtlCol="0" anchor="ctr"/>
           <a:lstStyle/>
           <a:p>
-            <a:pPr indent="0" marL="0">
+            <a:pPr marL="0" indent="0">
               <a:buNone/>
             </a:pPr>
             <a:r>
@@ -5757,7 +5497,7 @@
           <a:bodyPr wrap="square" rtlCol="0" anchor="ctr"/>
           <a:lstStyle/>
           <a:p>
-            <a:pPr indent="0" marL="0">
+            <a:pPr marL="0" indent="0">
               <a:buNone/>
             </a:pPr>
             <a:r>
@@ -5796,7 +5536,7 @@
           <a:bodyPr wrap="square" rtlCol="0" anchor="ctr"/>
           <a:lstStyle/>
           <a:p>
-            <a:pPr indent="0" marL="0">
+            <a:pPr marL="0" indent="0">
               <a:buNone/>
             </a:pPr>
             <a:r>
@@ -5835,7 +5575,7 @@
           <a:bodyPr wrap="square" rtlCol="0" anchor="ctr"/>
           <a:lstStyle/>
           <a:p>
-            <a:pPr indent="0" marL="0">
+            <a:pPr marL="0" indent="0">
               <a:buNone/>
             </a:pPr>
             <a:r>
@@ -5874,7 +5614,7 @@
           <a:bodyPr wrap="square" rtlCol="0" anchor="ctr"/>
           <a:lstStyle/>
           <a:p>
-            <a:pPr indent="0" marL="0">
+            <a:pPr marL="0" indent="0">
               <a:buNone/>
             </a:pPr>
             <a:r>
@@ -5913,7 +5653,7 @@
           <a:bodyPr wrap="square" rtlCol="0" anchor="ctr"/>
           <a:lstStyle/>
           <a:p>
-            <a:pPr indent="0" marL="0">
+            <a:pPr marL="0" indent="0">
               <a:buNone/>
             </a:pPr>
             <a:r>
@@ -5952,7 +5692,7 @@
           <a:bodyPr wrap="square" rtlCol="0" anchor="ctr"/>
           <a:lstStyle/>
           <a:p>
-            <a:pPr indent="0" marL="0">
+            <a:pPr marL="0" indent="0">
               <a:buNone/>
             </a:pPr>
             <a:r>
@@ -5991,7 +5731,7 @@
           <a:bodyPr wrap="square" rtlCol="0" anchor="ctr"/>
           <a:lstStyle/>
           <a:p>
-            <a:pPr indent="0" marL="0">
+            <a:pPr marL="0" indent="0">
               <a:buNone/>
             </a:pPr>
             <a:r>
@@ -6050,7 +5790,7 @@
           <a:bodyPr wrap="square" rtlCol="0" anchor="ctr"/>
           <a:lstStyle/>
           <a:p>
-            <a:pPr indent="0" marL="0">
+            <a:pPr marL="0" indent="0">
               <a:buNone/>
             </a:pPr>
             <a:r>
@@ -6089,7 +5829,7 @@
           <a:bodyPr wrap="square" rtlCol="0" anchor="ctr"/>
           <a:lstStyle/>
           <a:p>
-            <a:pPr indent="0" marL="0">
+            <a:pPr marL="0" indent="0">
               <a:buNone/>
             </a:pPr>
             <a:r>
@@ -6106,7 +5846,7 @@
             <a:endParaRPr lang="en-US" sz="800" dirty="0"/>
           </a:p>
           <a:p>
-            <a:pPr indent="0" marL="0">
+            <a:pPr marL="0" indent="0">
               <a:buNone/>
             </a:pPr>
             <a:r>
@@ -6123,7 +5863,7 @@
             <a:endParaRPr lang="en-US" sz="800" dirty="0"/>
           </a:p>
           <a:p>
-            <a:pPr indent="0" marL="0">
+            <a:pPr marL="0" indent="0">
               <a:buNone/>
             </a:pPr>
             <a:r>
@@ -6140,7 +5880,7 @@
             <a:endParaRPr lang="en-US" sz="800" dirty="0"/>
           </a:p>
           <a:p>
-            <a:pPr indent="0" marL="0">
+            <a:pPr marL="0" indent="0">
               <a:buNone/>
             </a:pPr>
             <a:r>
@@ -6179,7 +5919,7 @@
           <a:bodyPr wrap="square" rtlCol="0" anchor="ctr"/>
           <a:lstStyle/>
           <a:p>
-            <a:pPr indent="0" marL="0">
+            <a:pPr marL="0" indent="0">
               <a:buNone/>
             </a:pPr>
             <a:r>
@@ -6196,7 +5936,7 @@
             <a:endParaRPr lang="en-US" sz="800" dirty="0"/>
           </a:p>
           <a:p>
-            <a:pPr indent="0" marL="0">
+            <a:pPr marL="0" indent="0">
               <a:buNone/>
             </a:pPr>
             <a:r>
@@ -6213,7 +5953,7 @@
             <a:endParaRPr lang="en-US" sz="800" dirty="0"/>
           </a:p>
           <a:p>
-            <a:pPr indent="0" marL="0">
+            <a:pPr marL="0" indent="0">
               <a:buNone/>
             </a:pPr>
             <a:r>
@@ -6247,6 +5987,7 @@
         <a:solidFill>
           <a:srgbClr val="FFFFFF"/>
         </a:solidFill>
+        <a:effectLst/>
       </p:bgPr>
     </p:bg>
     <p:spTree>
@@ -6304,7 +6045,7 @@
           <a:bodyPr wrap="square" rtlCol="0" anchor="ctr"/>
           <a:lstStyle/>
           <a:p>
-            <a:pPr indent="0" marL="0">
+            <a:pPr marL="0" indent="0">
               <a:buNone/>
             </a:pPr>
             <a:r>
@@ -6343,7 +6084,7 @@
           <a:bodyPr wrap="square" rtlCol="0" anchor="ctr"/>
           <a:lstStyle/>
           <a:p>
-            <a:pPr indent="0" marL="0">
+            <a:pPr marL="0" indent="0">
               <a:buNone/>
             </a:pPr>
             <a:r>
@@ -6407,7 +6148,7 @@
           <a:bodyPr wrap="square" rtlCol="0" anchor="ctr"/>
           <a:lstStyle/>
           <a:p>
-            <a:pPr indent="0" marL="0">
+            <a:pPr marL="0" indent="0">
               <a:buNone/>
             </a:pPr>
             <a:r>
@@ -6446,7 +6187,7 @@
           <a:bodyPr wrap="square" rtlCol="0" anchor="ctr"/>
           <a:lstStyle/>
           <a:p>
-            <a:pPr indent="0" marL="0">
+            <a:pPr marL="0" indent="0">
               <a:buNone/>
             </a:pPr>
             <a:r>
@@ -6485,7 +6226,7 @@
           <a:bodyPr wrap="square" rtlCol="0" anchor="ctr"/>
           <a:lstStyle/>
           <a:p>
-            <a:pPr indent="0" marL="0">
+            <a:pPr marL="0" indent="0">
               <a:buNone/>
             </a:pPr>
             <a:r>
@@ -6524,7 +6265,7 @@
           <a:bodyPr wrap="square" rtlCol="0" anchor="ctr"/>
           <a:lstStyle/>
           <a:p>
-            <a:pPr indent="0" marL="0">
+            <a:pPr marL="0" indent="0">
               <a:buNone/>
             </a:pPr>
             <a:r>
@@ -6563,7 +6304,7 @@
           <a:bodyPr wrap="square" rtlCol="0" anchor="ctr"/>
           <a:lstStyle/>
           <a:p>
-            <a:pPr indent="0" marL="0">
+            <a:pPr marL="0" indent="0">
               <a:buNone/>
             </a:pPr>
             <a:r>
@@ -6602,7 +6343,7 @@
           <a:bodyPr wrap="square" rtlCol="0" anchor="ctr"/>
           <a:lstStyle/>
           <a:p>
-            <a:pPr indent="0" marL="0">
+            <a:pPr marL="0" indent="0">
               <a:buNone/>
             </a:pPr>
             <a:r>
@@ -6641,7 +6382,7 @@
           <a:bodyPr wrap="square" rtlCol="0" anchor="ctr"/>
           <a:lstStyle/>
           <a:p>
-            <a:pPr indent="0" marL="0">
+            <a:pPr marL="0" indent="0">
               <a:buNone/>
             </a:pPr>
             <a:r>
@@ -6680,7 +6421,7 @@
           <a:bodyPr wrap="square" rtlCol="0" anchor="ctr"/>
           <a:lstStyle/>
           <a:p>
-            <a:pPr indent="0" marL="0">
+            <a:pPr marL="0" indent="0">
               <a:buNone/>
             </a:pPr>
             <a:r>
@@ -6697,7 +6438,7 @@
             <a:endParaRPr lang="en-US" sz="750" dirty="0"/>
           </a:p>
           <a:p>
-            <a:pPr indent="0" marL="0">
+            <a:pPr marL="0" indent="0">
               <a:buNone/>
             </a:pPr>
             <a:r>
@@ -6714,7 +6455,7 @@
             <a:endParaRPr lang="en-US" sz="750" dirty="0"/>
           </a:p>
           <a:p>
-            <a:pPr indent="0" marL="0">
+            <a:pPr marL="0" indent="0">
               <a:buNone/>
             </a:pPr>
             <a:r>
@@ -6731,7 +6472,7 @@
             <a:endParaRPr lang="en-US" sz="750" dirty="0"/>
           </a:p>
           <a:p>
-            <a:pPr indent="0" marL="0">
+            <a:pPr marL="0" indent="0">
               <a:buNone/>
             </a:pPr>
             <a:r>
@@ -6790,7 +6531,7 @@
           <a:bodyPr wrap="square" rtlCol="0" anchor="ctr"/>
           <a:lstStyle/>
           <a:p>
-            <a:pPr indent="0" marL="0">
+            <a:pPr marL="0" indent="0">
               <a:buNone/>
             </a:pPr>
             <a:r>
@@ -6832,7 +6573,7 @@
             <a:prstDash val="solid"/>
           </a:ln>
           <a:effectLst>
-            <a:outerShdw sx="100000" sy="100000" kx="0" ky="0" algn="bl" rotWithShape="0" blurRad="63500" dist="25400" dir="8100000">
+            <a:outerShdw blurRad="63500" dist="25400" dir="8100000" algn="bl" rotWithShape="0">
               <a:srgbClr val="000000">
                 <a:alpha val="12000"/>
               </a:srgbClr>
@@ -6881,7 +6622,7 @@
           <a:bodyPr wrap="square" rtlCol="0" anchor="ctr"/>
           <a:lstStyle/>
           <a:p>
-            <a:pPr indent="0" marL="0">
+            <a:pPr marL="0" indent="0">
               <a:buNone/>
             </a:pPr>
             <a:r>
@@ -6920,7 +6661,7 @@
           <a:bodyPr wrap="square" rtlCol="0" anchor="ctr"/>
           <a:lstStyle/>
           <a:p>
-            <a:pPr indent="0" marL="0">
+            <a:pPr marL="0" indent="0">
               <a:buNone/>
             </a:pPr>
             <a:r>
@@ -6959,7 +6700,7 @@
           <a:bodyPr wrap="square" rtlCol="0" anchor="ctr"/>
           <a:lstStyle/>
           <a:p>
-            <a:pPr indent="0" marL="0">
+            <a:pPr marL="0" indent="0">
               <a:buNone/>
             </a:pPr>
             <a:r>
@@ -6998,7 +6739,7 @@
           <a:bodyPr wrap="square" rtlCol="0" anchor="ctr"/>
           <a:lstStyle/>
           <a:p>
-            <a:pPr indent="0" marL="0">
+            <a:pPr marL="0" indent="0">
               <a:buNone/>
             </a:pPr>
             <a:r>
@@ -7037,7 +6778,7 @@
           <a:bodyPr wrap="square" rtlCol="0" anchor="ctr"/>
           <a:lstStyle/>
           <a:p>
-            <a:pPr indent="0" marL="0">
+            <a:pPr marL="0" indent="0">
               <a:buNone/>
             </a:pPr>
             <a:r>
@@ -7076,7 +6817,7 @@
           <a:bodyPr wrap="square" rtlCol="0" anchor="ctr"/>
           <a:lstStyle/>
           <a:p>
-            <a:pPr indent="0" marL="0">
+            <a:pPr marL="0" indent="0">
               <a:buNone/>
             </a:pPr>
             <a:r>
@@ -7115,7 +6856,7 @@
           <a:bodyPr wrap="square" rtlCol="0" anchor="ctr"/>
           <a:lstStyle/>
           <a:p>
-            <a:pPr indent="0" marL="0">
+            <a:pPr marL="0" indent="0">
               <a:buNone/>
             </a:pPr>
             <a:r>
@@ -7154,7 +6895,7 @@
           <a:bodyPr wrap="square" rtlCol="0" anchor="ctr"/>
           <a:lstStyle/>
           <a:p>
-            <a:pPr indent="0" marL="0">
+            <a:pPr marL="0" indent="0">
               <a:buNone/>
             </a:pPr>
             <a:r>
@@ -7193,7 +6934,7 @@
           <a:bodyPr wrap="square" rtlCol="0" anchor="ctr"/>
           <a:lstStyle/>
           <a:p>
-            <a:pPr indent="0" marL="0">
+            <a:pPr marL="0" indent="0">
               <a:buNone/>
             </a:pPr>
             <a:r>
@@ -7232,7 +6973,7 @@
           <a:bodyPr wrap="square" rtlCol="0" anchor="ctr"/>
           <a:lstStyle/>
           <a:p>
-            <a:pPr indent="0" marL="0">
+            <a:pPr marL="0" indent="0">
               <a:buNone/>
             </a:pPr>
             <a:r>
@@ -7271,7 +7012,7 @@
           <a:bodyPr wrap="square" rtlCol="0" anchor="ctr"/>
           <a:lstStyle/>
           <a:p>
-            <a:pPr indent="0" marL="0">
+            <a:pPr marL="0" indent="0">
               <a:buNone/>
             </a:pPr>
             <a:r>
@@ -7330,7 +7071,7 @@
           <a:bodyPr wrap="square" rtlCol="0" anchor="ctr"/>
           <a:lstStyle/>
           <a:p>
-            <a:pPr indent="0" marL="0">
+            <a:pPr marL="0" indent="0">
               <a:buNone/>
             </a:pPr>
             <a:r>
@@ -7369,7 +7110,7 @@
           <a:bodyPr wrap="square" rtlCol="0" anchor="ctr"/>
           <a:lstStyle/>
           <a:p>
-            <a:pPr indent="0" marL="0">
+            <a:pPr marL="0" indent="0">
               <a:buNone/>
             </a:pPr>
             <a:r>
@@ -7386,7 +7127,7 @@
             <a:endParaRPr lang="en-US" sz="800" dirty="0"/>
           </a:p>
           <a:p>
-            <a:pPr indent="0" marL="0">
+            <a:pPr marL="0" indent="0">
               <a:buNone/>
             </a:pPr>
             <a:r>
@@ -7403,7 +7144,7 @@
             <a:endParaRPr lang="en-US" sz="800" dirty="0"/>
           </a:p>
           <a:p>
-            <a:pPr indent="0" marL="0">
+            <a:pPr marL="0" indent="0">
               <a:buNone/>
             </a:pPr>
             <a:r>
@@ -7420,7 +7161,7 @@
             <a:endParaRPr lang="en-US" sz="800" dirty="0"/>
           </a:p>
           <a:p>
-            <a:pPr indent="0" marL="0">
+            <a:pPr marL="0" indent="0">
               <a:buNone/>
             </a:pPr>
             <a:r>
@@ -7459,7 +7200,7 @@
           <a:bodyPr wrap="square" rtlCol="0" anchor="ctr"/>
           <a:lstStyle/>
           <a:p>
-            <a:pPr indent="0" marL="0">
+            <a:pPr marL="0" indent="0">
               <a:buNone/>
             </a:pPr>
             <a:r>
@@ -7476,7 +7217,7 @@
             <a:endParaRPr lang="en-US" sz="800" dirty="0"/>
           </a:p>
           <a:p>
-            <a:pPr indent="0" marL="0">
+            <a:pPr marL="0" indent="0">
               <a:buNone/>
             </a:pPr>
             <a:r>
@@ -7493,7 +7234,7 @@
             <a:endParaRPr lang="en-US" sz="800" dirty="0"/>
           </a:p>
           <a:p>
-            <a:pPr indent="0" marL="0">
+            <a:pPr marL="0" indent="0">
               <a:buNone/>
             </a:pPr>
             <a:r>
@@ -7527,6 +7268,7 @@
         <a:solidFill>
           <a:srgbClr val="FFFFFF"/>
         </a:solidFill>
+        <a:effectLst/>
       </p:bgPr>
     </p:bg>
     <p:spTree>
@@ -7584,7 +7326,7 @@
           <a:bodyPr wrap="square" rtlCol="0" anchor="ctr"/>
           <a:lstStyle/>
           <a:p>
-            <a:pPr indent="0" marL="0">
+            <a:pPr marL="0" indent="0">
               <a:buNone/>
             </a:pPr>
             <a:r>
@@ -7623,7 +7365,7 @@
           <a:bodyPr wrap="square" rtlCol="0" anchor="ctr"/>
           <a:lstStyle/>
           <a:p>
-            <a:pPr indent="0" marL="0">
+            <a:pPr marL="0" indent="0">
               <a:buNone/>
             </a:pPr>
             <a:r>
@@ -7687,7 +7429,7 @@
           <a:bodyPr wrap="square" rtlCol="0" anchor="ctr"/>
           <a:lstStyle/>
           <a:p>
-            <a:pPr indent="0" marL="0">
+            <a:pPr marL="0" indent="0">
               <a:buNone/>
             </a:pPr>
             <a:r>
@@ -7726,7 +7468,7 @@
           <a:bodyPr wrap="square" rtlCol="0" anchor="ctr"/>
           <a:lstStyle/>
           <a:p>
-            <a:pPr indent="0" marL="0">
+            <a:pPr marL="0" indent="0">
               <a:buNone/>
             </a:pPr>
             <a:r>
@@ -7765,7 +7507,7 @@
           <a:bodyPr wrap="square" rtlCol="0" anchor="ctr"/>
           <a:lstStyle/>
           <a:p>
-            <a:pPr indent="0" marL="0">
+            <a:pPr marL="0" indent="0">
               <a:buNone/>
             </a:pPr>
             <a:r>
@@ -7804,7 +7546,7 @@
           <a:bodyPr wrap="square" rtlCol="0" anchor="ctr"/>
           <a:lstStyle/>
           <a:p>
-            <a:pPr indent="0" marL="0">
+            <a:pPr marL="0" indent="0">
               <a:buNone/>
             </a:pPr>
             <a:r>
@@ -7843,7 +7585,7 @@
           <a:bodyPr wrap="square" rtlCol="0" anchor="ctr"/>
           <a:lstStyle/>
           <a:p>
-            <a:pPr indent="0" marL="0">
+            <a:pPr marL="0" indent="0">
               <a:buNone/>
             </a:pPr>
             <a:r>
@@ -7882,7 +7624,7 @@
           <a:bodyPr wrap="square" rtlCol="0" anchor="ctr"/>
           <a:lstStyle/>
           <a:p>
-            <a:pPr indent="0" marL="0">
+            <a:pPr marL="0" indent="0">
               <a:buNone/>
             </a:pPr>
             <a:r>
@@ -7921,7 +7663,7 @@
           <a:bodyPr wrap="square" rtlCol="0" anchor="ctr"/>
           <a:lstStyle/>
           <a:p>
-            <a:pPr indent="0" marL="0">
+            <a:pPr marL="0" indent="0">
               <a:buNone/>
             </a:pPr>
             <a:r>
@@ -7960,7 +7702,7 @@
           <a:bodyPr wrap="square" rtlCol="0" anchor="ctr"/>
           <a:lstStyle/>
           <a:p>
-            <a:pPr indent="0" marL="0">
+            <a:pPr marL="0" indent="0">
               <a:buNone/>
             </a:pPr>
             <a:r>
@@ -7977,7 +7719,7 @@
             <a:endParaRPr lang="en-US" sz="750" dirty="0"/>
           </a:p>
           <a:p>
-            <a:pPr indent="0" marL="0">
+            <a:pPr marL="0" indent="0">
               <a:buNone/>
             </a:pPr>
             <a:r>
@@ -7994,7 +7736,7 @@
             <a:endParaRPr lang="en-US" sz="750" dirty="0"/>
           </a:p>
           <a:p>
-            <a:pPr indent="0" marL="0">
+            <a:pPr marL="0" indent="0">
               <a:buNone/>
             </a:pPr>
             <a:r>
@@ -8011,7 +7753,7 @@
             <a:endParaRPr lang="en-US" sz="750" dirty="0"/>
           </a:p>
           <a:p>
-            <a:pPr indent="0" marL="0">
+            <a:pPr marL="0" indent="0">
               <a:buNone/>
             </a:pPr>
             <a:r>
@@ -8070,7 +7812,7 @@
           <a:bodyPr wrap="square" rtlCol="0" anchor="ctr"/>
           <a:lstStyle/>
           <a:p>
-            <a:pPr indent="0" marL="0">
+            <a:pPr marL="0" indent="0">
               <a:buNone/>
             </a:pPr>
             <a:r>
@@ -8112,7 +7854,7 @@
             <a:prstDash val="solid"/>
           </a:ln>
           <a:effectLst>
-            <a:outerShdw sx="100000" sy="100000" kx="0" ky="0" algn="bl" rotWithShape="0" blurRad="63500" dist="25400" dir="8100000">
+            <a:outerShdw blurRad="63500" dist="25400" dir="8100000" algn="bl" rotWithShape="0">
               <a:srgbClr val="000000">
                 <a:alpha val="12000"/>
               </a:srgbClr>
@@ -8161,7 +7903,7 @@
           <a:bodyPr wrap="square" rtlCol="0" anchor="ctr"/>
           <a:lstStyle/>
           <a:p>
-            <a:pPr indent="0" marL="0">
+            <a:pPr marL="0" indent="0">
               <a:buNone/>
             </a:pPr>
             <a:r>
@@ -8200,7 +7942,7 @@
           <a:bodyPr wrap="square" rtlCol="0" anchor="ctr"/>
           <a:lstStyle/>
           <a:p>
-            <a:pPr indent="0" marL="0">
+            <a:pPr marL="0" indent="0">
               <a:buNone/>
             </a:pPr>
             <a:r>
@@ -8239,7 +7981,7 @@
           <a:bodyPr wrap="square" rtlCol="0" anchor="ctr"/>
           <a:lstStyle/>
           <a:p>
-            <a:pPr indent="0" marL="0">
+            <a:pPr marL="0" indent="0">
               <a:buNone/>
             </a:pPr>
             <a:r>
@@ -8278,7 +8020,7 @@
           <a:bodyPr wrap="square" rtlCol="0" anchor="ctr"/>
           <a:lstStyle/>
           <a:p>
-            <a:pPr indent="0" marL="0">
+            <a:pPr marL="0" indent="0">
               <a:buNone/>
             </a:pPr>
             <a:r>
@@ -8317,7 +8059,7 @@
           <a:bodyPr wrap="square" rtlCol="0" anchor="ctr"/>
           <a:lstStyle/>
           <a:p>
-            <a:pPr indent="0" marL="0">
+            <a:pPr marL="0" indent="0">
               <a:buNone/>
             </a:pPr>
             <a:r>
@@ -8356,7 +8098,7 @@
           <a:bodyPr wrap="square" rtlCol="0" anchor="ctr"/>
           <a:lstStyle/>
           <a:p>
-            <a:pPr indent="0" marL="0">
+            <a:pPr marL="0" indent="0">
               <a:buNone/>
             </a:pPr>
             <a:r>
@@ -8395,7 +8137,7 @@
           <a:bodyPr wrap="square" rtlCol="0" anchor="ctr"/>
           <a:lstStyle/>
           <a:p>
-            <a:pPr indent="0" marL="0">
+            <a:pPr marL="0" indent="0">
               <a:buNone/>
             </a:pPr>
             <a:r>
@@ -8434,7 +8176,7 @@
           <a:bodyPr wrap="square" rtlCol="0" anchor="ctr"/>
           <a:lstStyle/>
           <a:p>
-            <a:pPr indent="0" marL="0">
+            <a:pPr marL="0" indent="0">
               <a:buNone/>
             </a:pPr>
             <a:r>
@@ -8473,7 +8215,7 @@
           <a:bodyPr wrap="square" rtlCol="0" anchor="ctr"/>
           <a:lstStyle/>
           <a:p>
-            <a:pPr indent="0" marL="0">
+            <a:pPr marL="0" indent="0">
               <a:buNone/>
             </a:pPr>
             <a:r>
@@ -8512,7 +8254,7 @@
           <a:bodyPr wrap="square" rtlCol="0" anchor="ctr"/>
           <a:lstStyle/>
           <a:p>
-            <a:pPr indent="0" marL="0">
+            <a:pPr marL="0" indent="0">
               <a:buNone/>
             </a:pPr>
             <a:r>
@@ -8551,7 +8293,7 @@
           <a:bodyPr wrap="square" rtlCol="0" anchor="ctr"/>
           <a:lstStyle/>
           <a:p>
-            <a:pPr indent="0" marL="0">
+            <a:pPr marL="0" indent="0">
               <a:buNone/>
             </a:pPr>
             <a:r>
@@ -8610,7 +8352,7 @@
           <a:bodyPr wrap="square" rtlCol="0" anchor="ctr"/>
           <a:lstStyle/>
           <a:p>
-            <a:pPr indent="0" marL="0">
+            <a:pPr marL="0" indent="0">
               <a:buNone/>
             </a:pPr>
             <a:r>
@@ -8649,7 +8391,7 @@
           <a:bodyPr wrap="square" rtlCol="0" anchor="ctr"/>
           <a:lstStyle/>
           <a:p>
-            <a:pPr indent="0" marL="0">
+            <a:pPr marL="0" indent="0">
               <a:buNone/>
             </a:pPr>
             <a:r>
@@ -8666,7 +8408,7 @@
             <a:endParaRPr lang="en-US" sz="800" dirty="0"/>
           </a:p>
           <a:p>
-            <a:pPr indent="0" marL="0">
+            <a:pPr marL="0" indent="0">
               <a:buNone/>
             </a:pPr>
             <a:r>
@@ -8683,7 +8425,7 @@
             <a:endParaRPr lang="en-US" sz="800" dirty="0"/>
           </a:p>
           <a:p>
-            <a:pPr indent="0" marL="0">
+            <a:pPr marL="0" indent="0">
               <a:buNone/>
             </a:pPr>
             <a:r>
@@ -8700,7 +8442,7 @@
             <a:endParaRPr lang="en-US" sz="800" dirty="0"/>
           </a:p>
           <a:p>
-            <a:pPr indent="0" marL="0">
+            <a:pPr marL="0" indent="0">
               <a:buNone/>
             </a:pPr>
             <a:r>
@@ -8739,7 +8481,7 @@
           <a:bodyPr wrap="square" rtlCol="0" anchor="ctr"/>
           <a:lstStyle/>
           <a:p>
-            <a:pPr indent="0" marL="0">
+            <a:pPr marL="0" indent="0">
               <a:buNone/>
             </a:pPr>
             <a:r>
@@ -8756,7 +8498,7 @@
             <a:endParaRPr lang="en-US" sz="800" dirty="0"/>
           </a:p>
           <a:p>
-            <a:pPr indent="0" marL="0">
+            <a:pPr marL="0" indent="0">
               <a:buNone/>
             </a:pPr>
             <a:r>
@@ -8773,7 +8515,7 @@
             <a:endParaRPr lang="en-US" sz="800" dirty="0"/>
           </a:p>
           <a:p>
-            <a:pPr indent="0" marL="0">
+            <a:pPr marL="0" indent="0">
               <a:buNone/>
             </a:pPr>
             <a:r>
@@ -8807,6 +8549,7 @@
         <a:solidFill>
           <a:srgbClr val="FFFFFF"/>
         </a:solidFill>
+        <a:effectLst/>
       </p:bgPr>
     </p:bg>
     <p:spTree>
@@ -8864,7 +8607,7 @@
           <a:bodyPr wrap="square" rtlCol="0" anchor="ctr"/>
           <a:lstStyle/>
           <a:p>
-            <a:pPr indent="0" marL="0">
+            <a:pPr marL="0" indent="0">
               <a:buNone/>
             </a:pPr>
             <a:r>
@@ -8903,7 +8646,7 @@
           <a:bodyPr wrap="square" rtlCol="0" anchor="ctr"/>
           <a:lstStyle/>
           <a:p>
-            <a:pPr indent="0" marL="0">
+            <a:pPr marL="0" indent="0">
               <a:buNone/>
             </a:pPr>
             <a:r>
@@ -8967,7 +8710,7 @@
           <a:bodyPr wrap="square" rtlCol="0" anchor="ctr"/>
           <a:lstStyle/>
           <a:p>
-            <a:pPr indent="0" marL="0">
+            <a:pPr marL="0" indent="0">
               <a:buNone/>
             </a:pPr>
             <a:r>
@@ -9006,7 +8749,7 @@
           <a:bodyPr wrap="square" rtlCol="0" anchor="ctr"/>
           <a:lstStyle/>
           <a:p>
-            <a:pPr indent="0" marL="0">
+            <a:pPr marL="0" indent="0">
               <a:buNone/>
             </a:pPr>
             <a:r>
@@ -9045,7 +8788,7 @@
           <a:bodyPr wrap="square" rtlCol="0" anchor="ctr"/>
           <a:lstStyle/>
           <a:p>
-            <a:pPr indent="0" marL="0">
+            <a:pPr marL="0" indent="0">
               <a:buNone/>
             </a:pPr>
             <a:r>
@@ -9084,7 +8827,7 @@
           <a:bodyPr wrap="square" rtlCol="0" anchor="ctr"/>
           <a:lstStyle/>
           <a:p>
-            <a:pPr indent="0" marL="0">
+            <a:pPr marL="0" indent="0">
               <a:buNone/>
             </a:pPr>
             <a:r>
@@ -9123,7 +8866,7 @@
           <a:bodyPr wrap="square" rtlCol="0" anchor="ctr"/>
           <a:lstStyle/>
           <a:p>
-            <a:pPr indent="0" marL="0">
+            <a:pPr marL="0" indent="0">
               <a:buNone/>
             </a:pPr>
             <a:r>
@@ -9162,7 +8905,7 @@
           <a:bodyPr wrap="square" rtlCol="0" anchor="ctr"/>
           <a:lstStyle/>
           <a:p>
-            <a:pPr indent="0" marL="0">
+            <a:pPr marL="0" indent="0">
               <a:buNone/>
             </a:pPr>
             <a:r>
@@ -9201,7 +8944,7 @@
           <a:bodyPr wrap="square" rtlCol="0" anchor="ctr"/>
           <a:lstStyle/>
           <a:p>
-            <a:pPr indent="0" marL="0">
+            <a:pPr marL="0" indent="0">
               <a:buNone/>
             </a:pPr>
             <a:r>
@@ -9240,7 +8983,7 @@
           <a:bodyPr wrap="square" rtlCol="0" anchor="ctr"/>
           <a:lstStyle/>
           <a:p>
-            <a:pPr indent="0" marL="0">
+            <a:pPr marL="0" indent="0">
               <a:buNone/>
             </a:pPr>
             <a:r>
@@ -9257,7 +9000,7 @@
             <a:endParaRPr lang="en-US" sz="750" dirty="0"/>
           </a:p>
           <a:p>
-            <a:pPr indent="0" marL="0">
+            <a:pPr marL="0" indent="0">
               <a:buNone/>
             </a:pPr>
             <a:r>
@@ -9274,7 +9017,7 @@
             <a:endParaRPr lang="en-US" sz="750" dirty="0"/>
           </a:p>
           <a:p>
-            <a:pPr indent="0" marL="0">
+            <a:pPr marL="0" indent="0">
               <a:buNone/>
             </a:pPr>
             <a:r>
@@ -9291,7 +9034,7 @@
             <a:endParaRPr lang="en-US" sz="750" dirty="0"/>
           </a:p>
           <a:p>
-            <a:pPr indent="0" marL="0">
+            <a:pPr marL="0" indent="0">
               <a:buNone/>
             </a:pPr>
             <a:r>
@@ -9350,7 +9093,7 @@
           <a:bodyPr wrap="square" rtlCol="0" anchor="ctr"/>
           <a:lstStyle/>
           <a:p>
-            <a:pPr indent="0" marL="0">
+            <a:pPr marL="0" indent="0">
               <a:buNone/>
             </a:pPr>
             <a:r>
@@ -9392,7 +9135,7 @@
             <a:prstDash val="solid"/>
           </a:ln>
           <a:effectLst>
-            <a:outerShdw sx="100000" sy="100000" kx="0" ky="0" algn="bl" rotWithShape="0" blurRad="63500" dist="25400" dir="8100000">
+            <a:outerShdw blurRad="63500" dist="25400" dir="8100000" algn="bl" rotWithShape="0">
               <a:srgbClr val="000000">
                 <a:alpha val="12000"/>
               </a:srgbClr>
@@ -9441,7 +9184,7 @@
           <a:bodyPr wrap="square" rtlCol="0" anchor="ctr"/>
           <a:lstStyle/>
           <a:p>
-            <a:pPr indent="0" marL="0">
+            <a:pPr marL="0" indent="0">
               <a:buNone/>
             </a:pPr>
             <a:r>
@@ -9480,7 +9223,7 @@
           <a:bodyPr wrap="square" rtlCol="0" anchor="ctr"/>
           <a:lstStyle/>
           <a:p>
-            <a:pPr indent="0" marL="0">
+            <a:pPr marL="0" indent="0">
               <a:buNone/>
             </a:pPr>
             <a:r>
@@ -9519,7 +9262,7 @@
           <a:bodyPr wrap="square" rtlCol="0" anchor="ctr"/>
           <a:lstStyle/>
           <a:p>
-            <a:pPr indent="0" marL="0">
+            <a:pPr marL="0" indent="0">
               <a:buNone/>
             </a:pPr>
             <a:r>
@@ -9558,7 +9301,7 @@
           <a:bodyPr wrap="square" rtlCol="0" anchor="ctr"/>
           <a:lstStyle/>
           <a:p>
-            <a:pPr indent="0" marL="0">
+            <a:pPr marL="0" indent="0">
               <a:buNone/>
             </a:pPr>
             <a:r>
@@ -9597,7 +9340,7 @@
           <a:bodyPr wrap="square" rtlCol="0" anchor="ctr"/>
           <a:lstStyle/>
           <a:p>
-            <a:pPr indent="0" marL="0">
+            <a:pPr marL="0" indent="0">
               <a:buNone/>
             </a:pPr>
             <a:r>
@@ -9636,7 +9379,7 @@
           <a:bodyPr wrap="square" rtlCol="0" anchor="ctr"/>
           <a:lstStyle/>
           <a:p>
-            <a:pPr indent="0" marL="0">
+            <a:pPr marL="0" indent="0">
               <a:buNone/>
             </a:pPr>
             <a:r>
@@ -9675,7 +9418,7 @@
           <a:bodyPr wrap="square" rtlCol="0" anchor="ctr"/>
           <a:lstStyle/>
           <a:p>
-            <a:pPr indent="0" marL="0">
+            <a:pPr marL="0" indent="0">
               <a:buNone/>
             </a:pPr>
             <a:r>
@@ -9714,7 +9457,7 @@
           <a:bodyPr wrap="square" rtlCol="0" anchor="ctr"/>
           <a:lstStyle/>
           <a:p>
-            <a:pPr indent="0" marL="0">
+            <a:pPr marL="0" indent="0">
               <a:buNone/>
             </a:pPr>
             <a:r>
@@ -9753,7 +9496,7 @@
           <a:bodyPr wrap="square" rtlCol="0" anchor="ctr"/>
           <a:lstStyle/>
           <a:p>
-            <a:pPr indent="0" marL="0">
+            <a:pPr marL="0" indent="0">
               <a:buNone/>
             </a:pPr>
             <a:r>
@@ -9792,7 +9535,7 @@
           <a:bodyPr wrap="square" rtlCol="0" anchor="ctr"/>
           <a:lstStyle/>
           <a:p>
-            <a:pPr indent="0" marL="0">
+            <a:pPr marL="0" indent="0">
               <a:buNone/>
             </a:pPr>
             <a:r>
@@ -9831,7 +9574,7 @@
           <a:bodyPr wrap="square" rtlCol="0" anchor="ctr"/>
           <a:lstStyle/>
           <a:p>
-            <a:pPr indent="0" marL="0">
+            <a:pPr marL="0" indent="0">
               <a:buNone/>
             </a:pPr>
             <a:r>
@@ -9890,7 +9633,7 @@
           <a:bodyPr wrap="square" rtlCol="0" anchor="ctr"/>
           <a:lstStyle/>
           <a:p>
-            <a:pPr indent="0" marL="0">
+            <a:pPr marL="0" indent="0">
               <a:buNone/>
             </a:pPr>
             <a:r>
@@ -9929,7 +9672,7 @@
           <a:bodyPr wrap="square" rtlCol="0" anchor="ctr"/>
           <a:lstStyle/>
           <a:p>
-            <a:pPr indent="0" marL="0">
+            <a:pPr marL="0" indent="0">
               <a:buNone/>
             </a:pPr>
             <a:r>
@@ -9946,7 +9689,7 @@
             <a:endParaRPr lang="en-US" sz="800" dirty="0"/>
           </a:p>
           <a:p>
-            <a:pPr indent="0" marL="0">
+            <a:pPr marL="0" indent="0">
               <a:buNone/>
             </a:pPr>
             <a:r>
@@ -9963,7 +9706,7 @@
             <a:endParaRPr lang="en-US" sz="800" dirty="0"/>
           </a:p>
           <a:p>
-            <a:pPr indent="0" marL="0">
+            <a:pPr marL="0" indent="0">
               <a:buNone/>
             </a:pPr>
             <a:r>
@@ -10002,7 +9745,7 @@
           <a:bodyPr wrap="square" rtlCol="0" anchor="ctr"/>
           <a:lstStyle/>
           <a:p>
-            <a:pPr indent="0" marL="0">
+            <a:pPr marL="0" indent="0">
               <a:buNone/>
             </a:pPr>
             <a:r>
@@ -10019,7 +9762,7 @@
             <a:endParaRPr lang="en-US" sz="800" dirty="0"/>
           </a:p>
           <a:p>
-            <a:pPr indent="0" marL="0">
+            <a:pPr marL="0" indent="0">
               <a:buNone/>
             </a:pPr>
             <a:r>
@@ -10036,7 +9779,7 @@
             <a:endParaRPr lang="en-US" sz="800" dirty="0"/>
           </a:p>
           <a:p>
-            <a:pPr indent="0" marL="0">
+            <a:pPr marL="0" indent="0">
               <a:buNone/>
             </a:pPr>
             <a:r>
@@ -10070,6 +9813,7 @@
         <a:solidFill>
           <a:srgbClr val="F5F5F5"/>
         </a:solidFill>
+        <a:effectLst/>
       </p:bgPr>
     </p:bg>
     <p:spTree>
@@ -10127,7 +9871,7 @@
           <a:bodyPr wrap="square" rtlCol="0" anchor="ctr"/>
           <a:lstStyle/>
           <a:p>
-            <a:pPr indent="0" marL="0">
+            <a:pPr marL="0" indent="0">
               <a:buNone/>
             </a:pPr>
             <a:r>
@@ -10166,7 +9910,7 @@
           </a:solidFill>
           <a:ln/>
           <a:effectLst>
-            <a:outerShdw sx="100000" sy="100000" kx="0" ky="0" algn="bl" rotWithShape="0" blurRad="63500" dist="25400" dir="8100000">
+            <a:outerShdw blurRad="63500" dist="25400" dir="8100000" algn="bl" rotWithShape="0">
               <a:srgbClr val="000000">
                 <a:alpha val="12000"/>
               </a:srgbClr>
@@ -10195,7 +9939,7 @@
           <a:bodyPr wrap="square" rtlCol="0" anchor="ctr"/>
           <a:lstStyle/>
           <a:p>
-            <a:pPr algn="ctr" indent="0" marL="0">
+            <a:pPr marL="0" indent="0" algn="ctr">
               <a:buNone/>
             </a:pPr>
             <a:r>
@@ -10258,7 +10002,7 @@
           </a:solidFill>
           <a:ln/>
           <a:effectLst>
-            <a:outerShdw sx="100000" sy="100000" kx="0" ky="0" algn="bl" rotWithShape="0" blurRad="63500" dist="25400" dir="8100000">
+            <a:outerShdw blurRad="63500" dist="25400" dir="8100000" algn="bl" rotWithShape="0">
               <a:srgbClr val="000000">
                 <a:alpha val="12000"/>
               </a:srgbClr>
@@ -10287,7 +10031,7 @@
           <a:bodyPr wrap="square" rtlCol="0" anchor="ctr"/>
           <a:lstStyle/>
           <a:p>
-            <a:pPr algn="ctr" indent="0" marL="0">
+            <a:pPr marL="0" indent="0" algn="ctr">
               <a:buNone/>
             </a:pPr>
             <a:r>
@@ -10350,7 +10094,7 @@
           </a:solidFill>
           <a:ln/>
           <a:effectLst>
-            <a:outerShdw sx="100000" sy="100000" kx="0" ky="0" algn="bl" rotWithShape="0" blurRad="63500" dist="25400" dir="8100000">
+            <a:outerShdw blurRad="63500" dist="25400" dir="8100000" algn="bl" rotWithShape="0">
               <a:srgbClr val="000000">
                 <a:alpha val="12000"/>
               </a:srgbClr>
@@ -10379,7 +10123,7 @@
           <a:bodyPr wrap="square" rtlCol="0" anchor="ctr"/>
           <a:lstStyle/>
           <a:p>
-            <a:pPr algn="ctr" indent="0" marL="0">
+            <a:pPr marL="0" indent="0" algn="ctr">
               <a:buNone/>
             </a:pPr>
             <a:r>
@@ -10442,7 +10186,7 @@
           </a:solidFill>
           <a:ln/>
           <a:effectLst>
-            <a:outerShdw sx="100000" sy="100000" kx="0" ky="0" algn="bl" rotWithShape="0" blurRad="63500" dist="25400" dir="8100000">
+            <a:outerShdw blurRad="63500" dist="25400" dir="8100000" algn="bl" rotWithShape="0">
               <a:srgbClr val="000000">
                 <a:alpha val="12000"/>
               </a:srgbClr>
@@ -10471,7 +10215,7 @@
           <a:bodyPr wrap="square" rtlCol="0" anchor="ctr"/>
           <a:lstStyle/>
           <a:p>
-            <a:pPr algn="ctr" indent="0" marL="0">
+            <a:pPr marL="0" indent="0" algn="ctr">
               <a:buNone/>
             </a:pPr>
             <a:r>
@@ -10534,7 +10278,7 @@
           </a:solidFill>
           <a:ln/>
           <a:effectLst>
-            <a:outerShdw sx="100000" sy="100000" kx="0" ky="0" algn="bl" rotWithShape="0" blurRad="63500" dist="25400" dir="8100000">
+            <a:outerShdw blurRad="63500" dist="25400" dir="8100000" algn="bl" rotWithShape="0">
               <a:srgbClr val="000000">
                 <a:alpha val="12000"/>
               </a:srgbClr>
@@ -10563,7 +10307,7 @@
           <a:bodyPr wrap="square" rtlCol="0" anchor="ctr"/>
           <a:lstStyle/>
           <a:p>
-            <a:pPr algn="ctr" indent="0" marL="0">
+            <a:pPr marL="0" indent="0" algn="ctr">
               <a:buNone/>
             </a:pPr>
             <a:r>
@@ -10602,7 +10346,7 @@
           </a:solidFill>
           <a:ln/>
           <a:effectLst>
-            <a:outerShdw sx="100000" sy="100000" kx="0" ky="0" algn="bl" rotWithShape="0" blurRad="63500" dist="25400" dir="8100000">
+            <a:outerShdw blurRad="63500" dist="25400" dir="8100000" algn="bl" rotWithShape="0">
               <a:srgbClr val="000000">
                 <a:alpha val="12000"/>
               </a:srgbClr>
@@ -10631,7 +10375,7 @@
           <a:bodyPr wrap="square" rtlCol="0" anchor="ctr"/>
           <a:lstStyle/>
           <a:p>
-            <a:pPr algn="ctr" indent="0" marL="0">
+            <a:pPr marL="0" indent="0" algn="ctr">
               <a:buNone/>
             </a:pPr>
             <a:r>
@@ -10670,7 +10414,7 @@
           </a:solidFill>
           <a:ln/>
           <a:effectLst>
-            <a:outerShdw sx="100000" sy="100000" kx="0" ky="0" algn="bl" rotWithShape="0" blurRad="63500" dist="25400" dir="8100000">
+            <a:outerShdw blurRad="63500" dist="25400" dir="8100000" algn="bl" rotWithShape="0">
               <a:srgbClr val="000000">
                 <a:alpha val="12000"/>
               </a:srgbClr>
@@ -10699,7 +10443,7 @@
           <a:bodyPr wrap="square" rtlCol="0" anchor="ctr"/>
           <a:lstStyle/>
           <a:p>
-            <a:pPr algn="ctr" indent="0" marL="0">
+            <a:pPr marL="0" indent="0" algn="ctr">
               <a:buNone/>
             </a:pPr>
             <a:r>
@@ -10810,7 +10554,7 @@
           </a:solidFill>
           <a:ln/>
           <a:effectLst>
-            <a:outerShdw sx="100000" sy="100000" kx="0" ky="0" algn="bl" rotWithShape="0" blurRad="63500" dist="25400" dir="8100000">
+            <a:outerShdw blurRad="63500" dist="25400" dir="8100000" algn="bl" rotWithShape="0">
               <a:srgbClr val="000000">
                 <a:alpha val="12000"/>
               </a:srgbClr>
@@ -10839,7 +10583,7 @@
           <a:bodyPr wrap="square" rtlCol="0" anchor="ctr"/>
           <a:lstStyle/>
           <a:p>
-            <a:pPr algn="ctr" indent="0" marL="0">
+            <a:pPr marL="0" indent="0" algn="ctr">
               <a:buNone/>
             </a:pPr>
             <a:r>
@@ -10878,7 +10622,7 @@
           </a:solidFill>
           <a:ln/>
           <a:effectLst>
-            <a:outerShdw sx="100000" sy="100000" kx="0" ky="0" algn="bl" rotWithShape="0" blurRad="63500" dist="25400" dir="8100000">
+            <a:outerShdw blurRad="63500" dist="25400" dir="8100000" algn="bl" rotWithShape="0">
               <a:srgbClr val="000000">
                 <a:alpha val="12000"/>
               </a:srgbClr>
@@ -10907,7 +10651,7 @@
           <a:bodyPr wrap="square" rtlCol="0" anchor="ctr"/>
           <a:lstStyle/>
           <a:p>
-            <a:pPr algn="ctr" indent="0" marL="0">
+            <a:pPr marL="0" indent="0" algn="ctr">
               <a:buNone/>
             </a:pPr>
             <a:r>
@@ -10946,7 +10690,7 @@
           </a:solidFill>
           <a:ln/>
           <a:effectLst>
-            <a:outerShdw sx="100000" sy="100000" kx="0" ky="0" algn="bl" rotWithShape="0" blurRad="63500" dist="25400" dir="8100000">
+            <a:outerShdw blurRad="63500" dist="25400" dir="8100000" algn="bl" rotWithShape="0">
               <a:srgbClr val="000000">
                 <a:alpha val="12000"/>
               </a:srgbClr>
@@ -10975,7 +10719,7 @@
           <a:bodyPr wrap="square" rtlCol="0" anchor="ctr"/>
           <a:lstStyle/>
           <a:p>
-            <a:pPr algn="ctr" indent="0" marL="0">
+            <a:pPr marL="0" indent="0" algn="ctr">
               <a:buNone/>
             </a:pPr>
             <a:r>
@@ -11014,7 +10758,7 @@
           </a:solidFill>
           <a:ln/>
           <a:effectLst>
-            <a:outerShdw sx="100000" sy="100000" kx="0" ky="0" algn="bl" rotWithShape="0" blurRad="63500" dist="25400" dir="8100000">
+            <a:outerShdw blurRad="63500" dist="25400" dir="8100000" algn="bl" rotWithShape="0">
               <a:srgbClr val="000000">
                 <a:alpha val="12000"/>
               </a:srgbClr>
@@ -11043,7 +10787,7 @@
           <a:bodyPr wrap="square" rtlCol="0" anchor="ctr"/>
           <a:lstStyle/>
           <a:p>
-            <a:pPr algn="ctr" indent="0" marL="0">
+            <a:pPr marL="0" indent="0" algn="ctr">
               <a:buNone/>
             </a:pPr>
             <a:r>
@@ -11082,7 +10826,7 @@
           </a:solidFill>
           <a:ln/>
           <a:effectLst>
-            <a:outerShdw sx="100000" sy="100000" kx="0" ky="0" algn="bl" rotWithShape="0" blurRad="63500" dist="25400" dir="8100000">
+            <a:outerShdw blurRad="63500" dist="25400" dir="8100000" algn="bl" rotWithShape="0">
               <a:srgbClr val="000000">
                 <a:alpha val="12000"/>
               </a:srgbClr>
@@ -11111,7 +10855,7 @@
           <a:bodyPr wrap="square" rtlCol="0" anchor="ctr"/>
           <a:lstStyle/>
           <a:p>
-            <a:pPr algn="ctr" indent="0" marL="0">
+            <a:pPr marL="0" indent="0" algn="ctr">
               <a:buNone/>
             </a:pPr>
             <a:r>
@@ -11150,7 +10894,7 @@
           </a:solidFill>
           <a:ln/>
           <a:effectLst>
-            <a:outerShdw sx="100000" sy="100000" kx="0" ky="0" algn="bl" rotWithShape="0" blurRad="63500" dist="25400" dir="8100000">
+            <a:outerShdw blurRad="63500" dist="25400" dir="8100000" algn="bl" rotWithShape="0">
               <a:srgbClr val="000000">
                 <a:alpha val="12000"/>
               </a:srgbClr>
@@ -11179,7 +10923,7 @@
           <a:bodyPr wrap="square" rtlCol="0" anchor="ctr"/>
           <a:lstStyle/>
           <a:p>
-            <a:pPr algn="ctr" indent="0" marL="0">
+            <a:pPr marL="0" indent="0" algn="ctr">
               <a:buNone/>
             </a:pPr>
             <a:r>
@@ -11266,7 +11010,7 @@
           <a:bodyPr wrap="square" rtlCol="0" anchor="ctr"/>
           <a:lstStyle/>
           <a:p>
-            <a:pPr indent="0" marL="0">
+            <a:pPr marL="0" indent="0">
               <a:buNone/>
             </a:pPr>
             <a:r>
@@ -11305,7 +11049,7 @@
           <a:bodyPr wrap="square" rtlCol="0" anchor="ctr"/>
           <a:lstStyle/>
           <a:p>
-            <a:pPr indent="0" marL="0">
+            <a:pPr marL="0" indent="0">
               <a:buNone/>
             </a:pPr>
             <a:r>
@@ -11344,7 +11088,7 @@
           <a:bodyPr wrap="square" rtlCol="0" anchor="ctr"/>
           <a:lstStyle/>
           <a:p>
-            <a:pPr indent="0" marL="0">
+            <a:pPr marL="0" indent="0">
               <a:buNone/>
             </a:pPr>
             <a:r>
@@ -11383,7 +11127,7 @@
           <a:bodyPr wrap="square" rtlCol="0" anchor="ctr"/>
           <a:lstStyle/>
           <a:p>
-            <a:pPr indent="0" marL="0">
+            <a:pPr marL="0" indent="0">
               <a:buNone/>
             </a:pPr>
             <a:r>
@@ -11422,7 +11166,7 @@
           </a:solidFill>
           <a:ln/>
           <a:effectLst>
-            <a:outerShdw sx="100000" sy="100000" kx="0" ky="0" algn="bl" rotWithShape="0" blurRad="63500" dist="25400" dir="8100000">
+            <a:outerShdw blurRad="63500" dist="25400" dir="8100000" algn="bl" rotWithShape="0">
               <a:srgbClr val="000000">
                 <a:alpha val="12000"/>
               </a:srgbClr>
@@ -11451,7 +11195,7 @@
           <a:bodyPr wrap="square" rtlCol="0" anchor="ctr"/>
           <a:lstStyle/>
           <a:p>
-            <a:pPr algn="ctr" indent="0" marL="0">
+            <a:pPr marL="0" indent="0" algn="ctr">
               <a:buNone/>
             </a:pPr>
             <a:r>
@@ -11509,6 +11253,7 @@
         <a:solidFill>
           <a:srgbClr val="F5F5F5"/>
         </a:solidFill>
+        <a:effectLst/>
       </p:bgPr>
     </p:bg>
     <p:spTree>
@@ -11566,7 +11311,7 @@
           <a:bodyPr wrap="square" rtlCol="0" anchor="ctr"/>
           <a:lstStyle/>
           <a:p>
-            <a:pPr indent="0" marL="0">
+            <a:pPr marL="0" indent="0">
               <a:buNone/>
             </a:pPr>
             <a:r>
@@ -11603,7 +11348,7 @@
           </a:solidFill>
           <a:ln/>
           <a:effectLst>
-            <a:outerShdw sx="100000" sy="100000" kx="0" ky="0" algn="bl" rotWithShape="0" blurRad="63500" dist="25400" dir="8100000">
+            <a:outerShdw blurRad="63500" dist="25400" dir="8100000" algn="bl" rotWithShape="0">
               <a:srgbClr val="000000">
                 <a:alpha val="12000"/>
               </a:srgbClr>
@@ -11632,7 +11377,7 @@
           <a:bodyPr wrap="square" rtlCol="0" anchor="ctr"/>
           <a:lstStyle/>
           <a:p>
-            <a:pPr algn="ctr" indent="0" marL="0">
+            <a:pPr marL="0" indent="0" algn="ctr">
               <a:buNone/>
             </a:pPr>
             <a:r>
@@ -11669,7 +11414,7 @@
           </a:solidFill>
           <a:ln/>
           <a:effectLst>
-            <a:outerShdw sx="100000" sy="100000" kx="0" ky="0" algn="bl" rotWithShape="0" blurRad="63500" dist="25400" dir="8100000">
+            <a:outerShdw blurRad="63500" dist="25400" dir="8100000" algn="bl" rotWithShape="0">
               <a:srgbClr val="000000">
                 <a:alpha val="12000"/>
               </a:srgbClr>
@@ -11718,7 +11463,7 @@
           <a:bodyPr wrap="square" rtlCol="0" anchor="ctr"/>
           <a:lstStyle/>
           <a:p>
-            <a:pPr indent="0" marL="0">
+            <a:pPr marL="0" indent="0">
               <a:buNone/>
             </a:pPr>
             <a:r>
@@ -11778,7 +11523,7 @@
           </a:solidFill>
           <a:ln/>
           <a:effectLst>
-            <a:outerShdw sx="100000" sy="100000" kx="0" ky="0" algn="bl" rotWithShape="0" blurRad="63500" dist="25400" dir="8100000">
+            <a:outerShdw blurRad="63500" dist="25400" dir="8100000" algn="bl" rotWithShape="0">
               <a:srgbClr val="000000">
                 <a:alpha val="12000"/>
               </a:srgbClr>
@@ -11827,7 +11572,7 @@
           <a:bodyPr wrap="square" rtlCol="0" anchor="ctr"/>
           <a:lstStyle/>
           <a:p>
-            <a:pPr indent="0" marL="0">
+            <a:pPr marL="0" indent="0">
               <a:buNone/>
             </a:pPr>
             <a:r>
@@ -11887,7 +11632,7 @@
           </a:solidFill>
           <a:ln/>
           <a:effectLst>
-            <a:outerShdw sx="100000" sy="100000" kx="0" ky="0" algn="bl" rotWithShape="0" blurRad="63500" dist="25400" dir="8100000">
+            <a:outerShdw blurRad="63500" dist="25400" dir="8100000" algn="bl" rotWithShape="0">
               <a:srgbClr val="000000">
                 <a:alpha val="12000"/>
               </a:srgbClr>
@@ -11916,7 +11661,7 @@
           <a:bodyPr wrap="square" rtlCol="0" anchor="ctr"/>
           <a:lstStyle/>
           <a:p>
-            <a:pPr algn="ctr" indent="0" marL="0">
+            <a:pPr marL="0" indent="0" algn="ctr">
               <a:buNone/>
             </a:pPr>
             <a:r>
@@ -11953,7 +11698,7 @@
           </a:solidFill>
           <a:ln/>
           <a:effectLst>
-            <a:outerShdw sx="100000" sy="100000" kx="0" ky="0" algn="bl" rotWithShape="0" blurRad="63500" dist="25400" dir="8100000">
+            <a:outerShdw blurRad="63500" dist="25400" dir="8100000" algn="bl" rotWithShape="0">
               <a:srgbClr val="000000">
                 <a:alpha val="12000"/>
               </a:srgbClr>
@@ -12002,7 +11747,7 @@
           <a:bodyPr wrap="square" rtlCol="0" anchor="ctr"/>
           <a:lstStyle/>
           <a:p>
-            <a:pPr indent="0" marL="0">
+            <a:pPr marL="0" indent="0">
               <a:buNone/>
             </a:pPr>
             <a:r>
@@ -12062,7 +11807,7 @@
           </a:solidFill>
           <a:ln/>
           <a:effectLst>
-            <a:outerShdw sx="100000" sy="100000" kx="0" ky="0" algn="bl" rotWithShape="0" blurRad="63500" dist="25400" dir="8100000">
+            <a:outerShdw blurRad="63500" dist="25400" dir="8100000" algn="bl" rotWithShape="0">
               <a:srgbClr val="000000">
                 <a:alpha val="12000"/>
               </a:srgbClr>
@@ -12111,7 +11856,7 @@
           <a:bodyPr wrap="square" rtlCol="0" anchor="ctr"/>
           <a:lstStyle/>
           <a:p>
-            <a:pPr indent="0" marL="0">
+            <a:pPr marL="0" indent="0">
               <a:buNone/>
             </a:pPr>
             <a:r>
@@ -12171,7 +11916,7 @@
           </a:solidFill>
           <a:ln/>
           <a:effectLst>
-            <a:outerShdw sx="100000" sy="100000" kx="0" ky="0" algn="bl" rotWithShape="0" blurRad="63500" dist="25400" dir="8100000">
+            <a:outerShdw blurRad="63500" dist="25400" dir="8100000" algn="bl" rotWithShape="0">
               <a:srgbClr val="000000">
                 <a:alpha val="12000"/>
               </a:srgbClr>
@@ -12200,7 +11945,7 @@
           <a:bodyPr wrap="square" rtlCol="0" anchor="ctr"/>
           <a:lstStyle/>
           <a:p>
-            <a:pPr algn="ctr" indent="0" marL="0">
+            <a:pPr marL="0" indent="0" algn="ctr">
               <a:buNone/>
             </a:pPr>
             <a:r>
@@ -12237,7 +11982,7 @@
           </a:solidFill>
           <a:ln/>
           <a:effectLst>
-            <a:outerShdw sx="100000" sy="100000" kx="0" ky="0" algn="bl" rotWithShape="0" blurRad="63500" dist="25400" dir="8100000">
+            <a:outerShdw blurRad="63500" dist="25400" dir="8100000" algn="bl" rotWithShape="0">
               <a:srgbClr val="000000">
                 <a:alpha val="12000"/>
               </a:srgbClr>
@@ -12286,7 +12031,7 @@
           <a:bodyPr wrap="square" rtlCol="0" anchor="ctr"/>
           <a:lstStyle/>
           <a:p>
-            <a:pPr indent="0" marL="0">
+            <a:pPr marL="0" indent="0">
               <a:buNone/>
             </a:pPr>
             <a:r>
@@ -12346,7 +12091,7 @@
           </a:solidFill>
           <a:ln/>
           <a:effectLst>
-            <a:outerShdw sx="100000" sy="100000" kx="0" ky="0" algn="bl" rotWithShape="0" blurRad="63500" dist="25400" dir="8100000">
+            <a:outerShdw blurRad="63500" dist="25400" dir="8100000" algn="bl" rotWithShape="0">
               <a:srgbClr val="000000">
                 <a:alpha val="12000"/>
               </a:srgbClr>
@@ -12395,7 +12140,7 @@
           <a:bodyPr wrap="square" rtlCol="0" anchor="ctr"/>
           <a:lstStyle/>
           <a:p>
-            <a:pPr indent="0" marL="0">
+            <a:pPr marL="0" indent="0">
               <a:buNone/>
             </a:pPr>
             <a:r>
@@ -12455,7 +12200,7 @@
           </a:solidFill>
           <a:ln/>
           <a:effectLst>
-            <a:outerShdw sx="100000" sy="100000" kx="0" ky="0" algn="bl" rotWithShape="0" blurRad="63500" dist="25400" dir="8100000">
+            <a:outerShdw blurRad="63500" dist="25400" dir="8100000" algn="bl" rotWithShape="0">
               <a:srgbClr val="000000">
                 <a:alpha val="12000"/>
               </a:srgbClr>
@@ -12504,7 +12249,7 @@
           <a:bodyPr wrap="square" rtlCol="0" anchor="ctr"/>
           <a:lstStyle/>
           <a:p>
-            <a:pPr indent="0" marL="0">
+            <a:pPr marL="0" indent="0">
               <a:buNone/>
             </a:pPr>
             <a:r>
@@ -12564,7 +12309,7 @@
           </a:solidFill>
           <a:ln/>
           <a:effectLst>
-            <a:outerShdw sx="100000" sy="100000" kx="0" ky="0" algn="bl" rotWithShape="0" blurRad="63500" dist="25400" dir="8100000">
+            <a:outerShdw blurRad="63500" dist="25400" dir="8100000" algn="bl" rotWithShape="0">
               <a:srgbClr val="000000">
                 <a:alpha val="12000"/>
               </a:srgbClr>
@@ -12613,7 +12358,7 @@
           <a:bodyPr wrap="square" rtlCol="0" anchor="ctr"/>
           <a:lstStyle/>
           <a:p>
-            <a:pPr indent="0" marL="0">
+            <a:pPr marL="0" indent="0">
               <a:buNone/>
             </a:pPr>
             <a:r>
@@ -12673,7 +12418,7 @@
           </a:solidFill>
           <a:ln/>
           <a:effectLst>
-            <a:outerShdw sx="100000" sy="100000" kx="0" ky="0" algn="bl" rotWithShape="0" blurRad="63500" dist="25400" dir="8100000">
+            <a:outerShdw blurRad="63500" dist="25400" dir="8100000" algn="bl" rotWithShape="0">
               <a:srgbClr val="000000">
                 <a:alpha val="12000"/>
               </a:srgbClr>
@@ -12702,7 +12447,7 @@
           <a:bodyPr wrap="square" rtlCol="0" anchor="ctr"/>
           <a:lstStyle/>
           <a:p>
-            <a:pPr algn="ctr" indent="0" marL="0">
+            <a:pPr marL="0" indent="0" algn="ctr">
               <a:buNone/>
             </a:pPr>
             <a:r>
@@ -12739,7 +12484,7 @@
           </a:solidFill>
           <a:ln/>
           <a:effectLst>
-            <a:outerShdw sx="100000" sy="100000" kx="0" ky="0" algn="bl" rotWithShape="0" blurRad="63500" dist="25400" dir="8100000">
+            <a:outerShdw blurRad="63500" dist="25400" dir="8100000" algn="bl" rotWithShape="0">
               <a:srgbClr val="000000">
                 <a:alpha val="12000"/>
               </a:srgbClr>
@@ -12788,7 +12533,7 @@
           <a:bodyPr wrap="square" rtlCol="0" anchor="ctr"/>
           <a:lstStyle/>
           <a:p>
-            <a:pPr indent="0" marL="0">
+            <a:pPr marL="0" indent="0">
               <a:buNone/>
             </a:pPr>
             <a:r>
@@ -12848,7 +12593,7 @@
           </a:solidFill>
           <a:ln/>
           <a:effectLst>
-            <a:outerShdw sx="100000" sy="100000" kx="0" ky="0" algn="bl" rotWithShape="0" blurRad="63500" dist="25400" dir="8100000">
+            <a:outerShdw blurRad="63500" dist="25400" dir="8100000" algn="bl" rotWithShape="0">
               <a:srgbClr val="000000">
                 <a:alpha val="12000"/>
               </a:srgbClr>
@@ -12897,7 +12642,7 @@
           <a:bodyPr wrap="square" rtlCol="0" anchor="ctr"/>
           <a:lstStyle/>
           <a:p>
-            <a:pPr indent="0" marL="0">
+            <a:pPr marL="0" indent="0">
               <a:buNone/>
             </a:pPr>
             <a:r>
@@ -12957,7 +12702,7 @@
           </a:solidFill>
           <a:ln/>
           <a:effectLst>
-            <a:outerShdw sx="100000" sy="100000" kx="0" ky="0" algn="bl" rotWithShape="0" blurRad="63500" dist="25400" dir="8100000">
+            <a:outerShdw blurRad="63500" dist="25400" dir="8100000" algn="bl" rotWithShape="0">
               <a:srgbClr val="000000">
                 <a:alpha val="12000"/>
               </a:srgbClr>
@@ -13006,7 +12751,7 @@
           <a:bodyPr wrap="square" rtlCol="0" anchor="ctr"/>
           <a:lstStyle/>
           <a:p>
-            <a:pPr indent="0" marL="0">
+            <a:pPr marL="0" indent="0">
               <a:buNone/>
             </a:pPr>
             <a:r>
@@ -13066,7 +12811,7 @@
           </a:solidFill>
           <a:ln/>
           <a:effectLst>
-            <a:outerShdw sx="100000" sy="100000" kx="0" ky="0" algn="bl" rotWithShape="0" blurRad="63500" dist="25400" dir="8100000">
+            <a:outerShdw blurRad="63500" dist="25400" dir="8100000" algn="bl" rotWithShape="0">
               <a:srgbClr val="000000">
                 <a:alpha val="12000"/>
               </a:srgbClr>
@@ -13115,7 +12860,7 @@
           <a:bodyPr wrap="square" rtlCol="0" anchor="ctr"/>
           <a:lstStyle/>
           <a:p>
-            <a:pPr indent="0" marL="0">
+            <a:pPr marL="0" indent="0">
               <a:buNone/>
             </a:pPr>
             <a:r>
@@ -13175,7 +12920,7 @@
           </a:solidFill>
           <a:ln/>
           <a:effectLst>
-            <a:outerShdw sx="100000" sy="100000" kx="0" ky="0" algn="bl" rotWithShape="0" blurRad="63500" dist="25400" dir="8100000">
+            <a:outerShdw blurRad="63500" dist="25400" dir="8100000" algn="bl" rotWithShape="0">
               <a:srgbClr val="000000">
                 <a:alpha val="12000"/>
               </a:srgbClr>
@@ -13204,7 +12949,7 @@
           <a:bodyPr wrap="square" rtlCol="0" anchor="ctr"/>
           <a:lstStyle/>
           <a:p>
-            <a:pPr algn="ctr" indent="0" marL="0">
+            <a:pPr marL="0" indent="0" algn="ctr">
               <a:buNone/>
             </a:pPr>
             <a:r>
@@ -13241,7 +12986,7 @@
           </a:solidFill>
           <a:ln/>
           <a:effectLst>
-            <a:outerShdw sx="100000" sy="100000" kx="0" ky="0" algn="bl" rotWithShape="0" blurRad="63500" dist="25400" dir="8100000">
+            <a:outerShdw blurRad="63500" dist="25400" dir="8100000" algn="bl" rotWithShape="0">
               <a:srgbClr val="000000">
                 <a:alpha val="12000"/>
               </a:srgbClr>
@@ -13290,7 +13035,7 @@
           <a:bodyPr wrap="square" rtlCol="0" anchor="ctr"/>
           <a:lstStyle/>
           <a:p>
-            <a:pPr indent="0" marL="0">
+            <a:pPr marL="0" indent="0">
               <a:buNone/>
             </a:pPr>
             <a:r>
@@ -13350,7 +13095,7 @@
           </a:solidFill>
           <a:ln/>
           <a:effectLst>
-            <a:outerShdw sx="100000" sy="100000" kx="0" ky="0" algn="bl" rotWithShape="0" blurRad="63500" dist="25400" dir="8100000">
+            <a:outerShdw blurRad="63500" dist="25400" dir="8100000" algn="bl" rotWithShape="0">
               <a:srgbClr val="000000">
                 <a:alpha val="12000"/>
               </a:srgbClr>
@@ -13399,7 +13144,7 @@
           <a:bodyPr wrap="square" rtlCol="0" anchor="ctr"/>
           <a:lstStyle/>
           <a:p>
-            <a:pPr indent="0" marL="0">
+            <a:pPr marL="0" indent="0">
               <a:buNone/>
             </a:pPr>
             <a:r>
@@ -13459,7 +13204,7 @@
           </a:solidFill>
           <a:ln/>
           <a:effectLst>
-            <a:outerShdw sx="100000" sy="100000" kx="0" ky="0" algn="bl" rotWithShape="0" blurRad="63500" dist="25400" dir="8100000">
+            <a:outerShdw blurRad="63500" dist="25400" dir="8100000" algn="bl" rotWithShape="0">
               <a:srgbClr val="000000">
                 <a:alpha val="12000"/>
               </a:srgbClr>
@@ -13508,7 +13253,7 @@
           <a:bodyPr wrap="square" rtlCol="0" anchor="ctr"/>
           <a:lstStyle/>
           <a:p>
-            <a:pPr indent="0" marL="0">
+            <a:pPr marL="0" indent="0">
               <a:buNone/>
             </a:pPr>
             <a:r>
@@ -13568,7 +13313,7 @@
           </a:solidFill>
           <a:ln/>
           <a:effectLst>
-            <a:outerShdw sx="100000" sy="100000" kx="0" ky="0" algn="bl" rotWithShape="0" blurRad="63500" dist="25400" dir="8100000">
+            <a:outerShdw blurRad="63500" dist="25400" dir="8100000" algn="bl" rotWithShape="0">
               <a:srgbClr val="000000">
                 <a:alpha val="12000"/>
               </a:srgbClr>
@@ -13617,7 +13362,7 @@
           <a:bodyPr wrap="square" rtlCol="0" anchor="ctr"/>
           <a:lstStyle/>
           <a:p>
-            <a:pPr indent="0" marL="0">
+            <a:pPr marL="0" indent="0">
               <a:buNone/>
             </a:pPr>
             <a:r>
@@ -13674,6 +13419,7 @@
         <a:solidFill>
           <a:srgbClr val="FFFFFF"/>
         </a:solidFill>
+        <a:effectLst/>
       </p:bgPr>
     </p:bg>
     <p:spTree>
@@ -13731,7 +13477,7 @@
           <a:bodyPr wrap="square" rtlCol="0" anchor="ctr"/>
           <a:lstStyle/>
           <a:p>
-            <a:pPr indent="0" marL="0">
+            <a:pPr marL="0" indent="0">
               <a:buNone/>
             </a:pPr>
             <a:r>
@@ -13770,7 +13516,7 @@
           <a:bodyPr wrap="square" rtlCol="0" anchor="ctr"/>
           <a:lstStyle/>
           <a:p>
-            <a:pPr indent="0" marL="0">
+            <a:pPr marL="0" indent="0">
               <a:buNone/>
             </a:pPr>
             <a:r>
@@ -13834,7 +13580,7 @@
           <a:bodyPr wrap="square" rtlCol="0" anchor="ctr"/>
           <a:lstStyle/>
           <a:p>
-            <a:pPr indent="0" marL="0">
+            <a:pPr marL="0" indent="0">
               <a:buNone/>
             </a:pPr>
             <a:r>
@@ -13873,7 +13619,7 @@
           <a:bodyPr wrap="square" rtlCol="0" anchor="ctr"/>
           <a:lstStyle/>
           <a:p>
-            <a:pPr indent="0" marL="0">
+            <a:pPr marL="0" indent="0">
               <a:buNone/>
             </a:pPr>
             <a:r>
@@ -13912,7 +13658,7 @@
           <a:bodyPr wrap="square" rtlCol="0" anchor="ctr"/>
           <a:lstStyle/>
           <a:p>
-            <a:pPr indent="0" marL="0">
+            <a:pPr marL="0" indent="0">
               <a:buNone/>
             </a:pPr>
             <a:r>
@@ -13951,7 +13697,7 @@
           <a:bodyPr wrap="square" rtlCol="0" anchor="ctr"/>
           <a:lstStyle/>
           <a:p>
-            <a:pPr indent="0" marL="0">
+            <a:pPr marL="0" indent="0">
               <a:buNone/>
             </a:pPr>
             <a:r>
@@ -13990,7 +13736,7 @@
           <a:bodyPr wrap="square" rtlCol="0" anchor="ctr"/>
           <a:lstStyle/>
           <a:p>
-            <a:pPr indent="0" marL="0">
+            <a:pPr marL="0" indent="0">
               <a:buNone/>
             </a:pPr>
             <a:r>
@@ -14029,7 +13775,7 @@
           <a:bodyPr wrap="square" rtlCol="0" anchor="ctr"/>
           <a:lstStyle/>
           <a:p>
-            <a:pPr indent="0" marL="0">
+            <a:pPr marL="0" indent="0">
               <a:buNone/>
             </a:pPr>
             <a:r>
@@ -14068,7 +13814,7 @@
           <a:bodyPr wrap="square" rtlCol="0" anchor="ctr"/>
           <a:lstStyle/>
           <a:p>
-            <a:pPr indent="0" marL="0">
+            <a:pPr marL="0" indent="0">
               <a:buNone/>
             </a:pPr>
             <a:r>
@@ -14107,7 +13853,7 @@
           <a:bodyPr wrap="square" rtlCol="0" anchor="ctr"/>
           <a:lstStyle/>
           <a:p>
-            <a:pPr indent="0" marL="0">
+            <a:pPr marL="0" indent="0">
               <a:buNone/>
             </a:pPr>
             <a:r>
@@ -14124,7 +13870,7 @@
             <a:endParaRPr lang="en-US" sz="750" dirty="0"/>
           </a:p>
           <a:p>
-            <a:pPr indent="0" marL="0">
+            <a:pPr marL="0" indent="0">
               <a:buNone/>
             </a:pPr>
             <a:r>
@@ -14141,7 +13887,7 @@
             <a:endParaRPr lang="en-US" sz="750" dirty="0"/>
           </a:p>
           <a:p>
-            <a:pPr indent="0" marL="0">
+            <a:pPr marL="0" indent="0">
               <a:buNone/>
             </a:pPr>
             <a:r>
@@ -14158,7 +13904,7 @@
             <a:endParaRPr lang="en-US" sz="750" dirty="0"/>
           </a:p>
           <a:p>
-            <a:pPr indent="0" marL="0">
+            <a:pPr marL="0" indent="0">
               <a:buNone/>
             </a:pPr>
             <a:r>
@@ -14175,7 +13921,7 @@
             <a:endParaRPr lang="en-US" sz="750" dirty="0"/>
           </a:p>
           <a:p>
-            <a:pPr indent="0" marL="0">
+            <a:pPr marL="0" indent="0">
               <a:buNone/>
             </a:pPr>
             <a:r>
@@ -14234,7 +13980,7 @@
           <a:bodyPr wrap="square" rtlCol="0" anchor="ctr"/>
           <a:lstStyle/>
           <a:p>
-            <a:pPr indent="0" marL="0">
+            <a:pPr marL="0" indent="0">
               <a:buNone/>
             </a:pPr>
             <a:r>
@@ -14276,7 +14022,7 @@
             <a:prstDash val="solid"/>
           </a:ln>
           <a:effectLst>
-            <a:outerShdw sx="100000" sy="100000" kx="0" ky="0" algn="bl" rotWithShape="0" blurRad="63500" dist="25400" dir="8100000">
+            <a:outerShdw blurRad="63500" dist="25400" dir="8100000" algn="bl" rotWithShape="0">
               <a:srgbClr val="000000">
                 <a:alpha val="12000"/>
               </a:srgbClr>
@@ -14325,7 +14071,7 @@
           <a:bodyPr wrap="square" rtlCol="0" anchor="ctr"/>
           <a:lstStyle/>
           <a:p>
-            <a:pPr indent="0" marL="0">
+            <a:pPr marL="0" indent="0">
               <a:buNone/>
             </a:pPr>
             <a:r>
@@ -14364,7 +14110,7 @@
           <a:bodyPr wrap="square" rtlCol="0" anchor="ctr"/>
           <a:lstStyle/>
           <a:p>
-            <a:pPr indent="0" marL="0">
+            <a:pPr marL="0" indent="0">
               <a:buNone/>
             </a:pPr>
             <a:r>
@@ -14403,7 +14149,7 @@
           <a:bodyPr wrap="square" rtlCol="0" anchor="ctr"/>
           <a:lstStyle/>
           <a:p>
-            <a:pPr indent="0" marL="0">
+            <a:pPr marL="0" indent="0">
               <a:buNone/>
             </a:pPr>
             <a:r>
@@ -14442,7 +14188,7 @@
           <a:bodyPr wrap="square" rtlCol="0" anchor="ctr"/>
           <a:lstStyle/>
           <a:p>
-            <a:pPr indent="0" marL="0">
+            <a:pPr marL="0" indent="0">
               <a:buNone/>
             </a:pPr>
             <a:r>
@@ -14481,7 +14227,7 @@
           <a:bodyPr wrap="square" rtlCol="0" anchor="ctr"/>
           <a:lstStyle/>
           <a:p>
-            <a:pPr indent="0" marL="0">
+            <a:pPr marL="0" indent="0">
               <a:buNone/>
             </a:pPr>
             <a:r>
@@ -14520,7 +14266,7 @@
           <a:bodyPr wrap="square" rtlCol="0" anchor="ctr"/>
           <a:lstStyle/>
           <a:p>
-            <a:pPr indent="0" marL="0">
+            <a:pPr marL="0" indent="0">
               <a:buNone/>
             </a:pPr>
             <a:r>
@@ -14559,7 +14305,7 @@
           <a:bodyPr wrap="square" rtlCol="0" anchor="ctr"/>
           <a:lstStyle/>
           <a:p>
-            <a:pPr indent="0" marL="0">
+            <a:pPr marL="0" indent="0">
               <a:buNone/>
             </a:pPr>
             <a:r>
@@ -14598,7 +14344,7 @@
           <a:bodyPr wrap="square" rtlCol="0" anchor="ctr"/>
           <a:lstStyle/>
           <a:p>
-            <a:pPr indent="0" marL="0">
+            <a:pPr marL="0" indent="0">
               <a:buNone/>
             </a:pPr>
             <a:r>
@@ -14637,7 +14383,7 @@
           <a:bodyPr wrap="square" rtlCol="0" anchor="ctr"/>
           <a:lstStyle/>
           <a:p>
-            <a:pPr indent="0" marL="0">
+            <a:pPr marL="0" indent="0">
               <a:buNone/>
             </a:pPr>
             <a:r>
@@ -14676,7 +14422,7 @@
           <a:bodyPr wrap="square" rtlCol="0" anchor="ctr"/>
           <a:lstStyle/>
           <a:p>
-            <a:pPr indent="0" marL="0">
+            <a:pPr marL="0" indent="0">
               <a:buNone/>
             </a:pPr>
             <a:r>
@@ -14715,7 +14461,7 @@
           <a:bodyPr wrap="square" rtlCol="0" anchor="ctr"/>
           <a:lstStyle/>
           <a:p>
-            <a:pPr indent="0" marL="0">
+            <a:pPr marL="0" indent="0">
               <a:buNone/>
             </a:pPr>
             <a:r>
@@ -14754,7 +14500,7 @@
           <a:bodyPr wrap="square" rtlCol="0" anchor="ctr"/>
           <a:lstStyle/>
           <a:p>
-            <a:pPr indent="0" marL="0">
+            <a:pPr marL="0" indent="0">
               <a:buNone/>
             </a:pPr>
             <a:r>
@@ -14813,7 +14559,7 @@
           <a:bodyPr wrap="square" rtlCol="0" anchor="ctr"/>
           <a:lstStyle/>
           <a:p>
-            <a:pPr indent="0" marL="0">
+            <a:pPr marL="0" indent="0">
               <a:buNone/>
             </a:pPr>
             <a:r>
@@ -14852,7 +14598,7 @@
           <a:bodyPr wrap="square" rtlCol="0" anchor="ctr"/>
           <a:lstStyle/>
           <a:p>
-            <a:pPr indent="0" marL="0">
+            <a:pPr marL="0" indent="0">
               <a:buNone/>
             </a:pPr>
             <a:r>
@@ -14869,7 +14615,7 @@
             <a:endParaRPr lang="en-US" sz="800" dirty="0"/>
           </a:p>
           <a:p>
-            <a:pPr indent="0" marL="0">
+            <a:pPr marL="0" indent="0">
               <a:buNone/>
             </a:pPr>
             <a:r>
@@ -14886,7 +14632,7 @@
             <a:endParaRPr lang="en-US" sz="800" dirty="0"/>
           </a:p>
           <a:p>
-            <a:pPr indent="0" marL="0">
+            <a:pPr marL="0" indent="0">
               <a:buNone/>
             </a:pPr>
             <a:r>
@@ -14903,7 +14649,7 @@
             <a:endParaRPr lang="en-US" sz="800" dirty="0"/>
           </a:p>
           <a:p>
-            <a:pPr indent="0" marL="0">
+            <a:pPr marL="0" indent="0">
               <a:buNone/>
             </a:pPr>
             <a:r>
@@ -14942,7 +14688,7 @@
           <a:bodyPr wrap="square" rtlCol="0" anchor="ctr"/>
           <a:lstStyle/>
           <a:p>
-            <a:pPr indent="0" marL="0">
+            <a:pPr marL="0" indent="0">
               <a:buNone/>
             </a:pPr>
             <a:r>
@@ -14959,7 +14705,7 @@
             <a:endParaRPr lang="en-US" sz="800" dirty="0"/>
           </a:p>
           <a:p>
-            <a:pPr indent="0" marL="0">
+            <a:pPr marL="0" indent="0">
               <a:buNone/>
             </a:pPr>
             <a:r>
@@ -14976,7 +14722,7 @@
             <a:endParaRPr lang="en-US" sz="800" dirty="0"/>
           </a:p>
           <a:p>
-            <a:pPr indent="0" marL="0">
+            <a:pPr marL="0" indent="0">
               <a:buNone/>
             </a:pPr>
             <a:r>
@@ -14993,7 +14739,7 @@
             <a:endParaRPr lang="en-US" sz="800" dirty="0"/>
           </a:p>
           <a:p>
-            <a:pPr indent="0" marL="0">
+            <a:pPr marL="0" indent="0">
               <a:buNone/>
             </a:pPr>
             <a:r>
@@ -15027,6 +14773,7 @@
         <a:solidFill>
           <a:srgbClr val="FFFFFF"/>
         </a:solidFill>
+        <a:effectLst/>
       </p:bgPr>
     </p:bg>
     <p:spTree>
@@ -15084,7 +14831,7 @@
           <a:bodyPr wrap="square" rtlCol="0" anchor="ctr"/>
           <a:lstStyle/>
           <a:p>
-            <a:pPr indent="0" marL="0">
+            <a:pPr marL="0" indent="0">
               <a:buNone/>
             </a:pPr>
             <a:r>
@@ -15123,7 +14870,7 @@
           <a:bodyPr wrap="square" rtlCol="0" anchor="ctr"/>
           <a:lstStyle/>
           <a:p>
-            <a:pPr indent="0" marL="0">
+            <a:pPr marL="0" indent="0">
               <a:buNone/>
             </a:pPr>
             <a:r>
@@ -15187,7 +14934,7 @@
           <a:bodyPr wrap="square" rtlCol="0" anchor="ctr"/>
           <a:lstStyle/>
           <a:p>
-            <a:pPr indent="0" marL="0">
+            <a:pPr marL="0" indent="0">
               <a:buNone/>
             </a:pPr>
             <a:r>
@@ -15226,7 +14973,7 @@
           <a:bodyPr wrap="square" rtlCol="0" anchor="ctr"/>
           <a:lstStyle/>
           <a:p>
-            <a:pPr indent="0" marL="0">
+            <a:pPr marL="0" indent="0">
               <a:buNone/>
             </a:pPr>
             <a:r>
@@ -15265,7 +15012,7 @@
           <a:bodyPr wrap="square" rtlCol="0" anchor="ctr"/>
           <a:lstStyle/>
           <a:p>
-            <a:pPr indent="0" marL="0">
+            <a:pPr marL="0" indent="0">
               <a:buNone/>
             </a:pPr>
             <a:r>
@@ -15304,7 +15051,7 @@
           <a:bodyPr wrap="square" rtlCol="0" anchor="ctr"/>
           <a:lstStyle/>
           <a:p>
-            <a:pPr indent="0" marL="0">
+            <a:pPr marL="0" indent="0">
               <a:buNone/>
             </a:pPr>
             <a:r>
@@ -15343,7 +15090,7 @@
           <a:bodyPr wrap="square" rtlCol="0" anchor="ctr"/>
           <a:lstStyle/>
           <a:p>
-            <a:pPr indent="0" marL="0">
+            <a:pPr marL="0" indent="0">
               <a:buNone/>
             </a:pPr>
             <a:r>
@@ -15382,7 +15129,7 @@
           <a:bodyPr wrap="square" rtlCol="0" anchor="ctr"/>
           <a:lstStyle/>
           <a:p>
-            <a:pPr indent="0" marL="0">
+            <a:pPr marL="0" indent="0">
               <a:buNone/>
             </a:pPr>
             <a:r>
@@ -15421,7 +15168,7 @@
           <a:bodyPr wrap="square" rtlCol="0" anchor="ctr"/>
           <a:lstStyle/>
           <a:p>
-            <a:pPr indent="0" marL="0">
+            <a:pPr marL="0" indent="0">
               <a:buNone/>
             </a:pPr>
             <a:r>
@@ -15460,7 +15207,7 @@
           <a:bodyPr wrap="square" rtlCol="0" anchor="ctr"/>
           <a:lstStyle/>
           <a:p>
-            <a:pPr indent="0" marL="0">
+            <a:pPr marL="0" indent="0">
               <a:buNone/>
             </a:pPr>
             <a:r>
@@ -15477,7 +15224,7 @@
             <a:endParaRPr lang="en-US" sz="750" dirty="0"/>
           </a:p>
           <a:p>
-            <a:pPr indent="0" marL="0">
+            <a:pPr marL="0" indent="0">
               <a:buNone/>
             </a:pPr>
             <a:r>
@@ -15494,7 +15241,7 @@
             <a:endParaRPr lang="en-US" sz="750" dirty="0"/>
           </a:p>
           <a:p>
-            <a:pPr indent="0" marL="0">
+            <a:pPr marL="0" indent="0">
               <a:buNone/>
             </a:pPr>
             <a:r>
@@ -15511,7 +15258,7 @@
             <a:endParaRPr lang="en-US" sz="750" dirty="0"/>
           </a:p>
           <a:p>
-            <a:pPr indent="0" marL="0">
+            <a:pPr marL="0" indent="0">
               <a:buNone/>
             </a:pPr>
             <a:r>
@@ -15570,7 +15317,7 @@
           <a:bodyPr wrap="square" rtlCol="0" anchor="ctr"/>
           <a:lstStyle/>
           <a:p>
-            <a:pPr indent="0" marL="0">
+            <a:pPr marL="0" indent="0">
               <a:buNone/>
             </a:pPr>
             <a:r>
@@ -15612,7 +15359,7 @@
             <a:prstDash val="solid"/>
           </a:ln>
           <a:effectLst>
-            <a:outerShdw sx="100000" sy="100000" kx="0" ky="0" algn="bl" rotWithShape="0" blurRad="63500" dist="25400" dir="8100000">
+            <a:outerShdw blurRad="63500" dist="25400" dir="8100000" algn="bl" rotWithShape="0">
               <a:srgbClr val="000000">
                 <a:alpha val="12000"/>
               </a:srgbClr>
@@ -15661,7 +15408,7 @@
           <a:bodyPr wrap="square" rtlCol="0" anchor="ctr"/>
           <a:lstStyle/>
           <a:p>
-            <a:pPr indent="0" marL="0">
+            <a:pPr marL="0" indent="0">
               <a:buNone/>
             </a:pPr>
             <a:r>
@@ -15700,7 +15447,7 @@
           <a:bodyPr wrap="square" rtlCol="0" anchor="ctr"/>
           <a:lstStyle/>
           <a:p>
-            <a:pPr indent="0" marL="0">
+            <a:pPr marL="0" indent="0">
               <a:buNone/>
             </a:pPr>
             <a:r>
@@ -15739,7 +15486,7 @@
           <a:bodyPr wrap="square" rtlCol="0" anchor="ctr"/>
           <a:lstStyle/>
           <a:p>
-            <a:pPr indent="0" marL="0">
+            <a:pPr marL="0" indent="0">
               <a:buNone/>
             </a:pPr>
             <a:r>
@@ -15778,7 +15525,7 @@
           <a:bodyPr wrap="square" rtlCol="0" anchor="ctr"/>
           <a:lstStyle/>
           <a:p>
-            <a:pPr indent="0" marL="0">
+            <a:pPr marL="0" indent="0">
               <a:buNone/>
             </a:pPr>
             <a:r>
@@ -15817,7 +15564,7 @@
           <a:bodyPr wrap="square" rtlCol="0" anchor="ctr"/>
           <a:lstStyle/>
           <a:p>
-            <a:pPr indent="0" marL="0">
+            <a:pPr marL="0" indent="0">
               <a:buNone/>
             </a:pPr>
             <a:r>
@@ -15856,7 +15603,7 @@
           <a:bodyPr wrap="square" rtlCol="0" anchor="ctr"/>
           <a:lstStyle/>
           <a:p>
-            <a:pPr indent="0" marL="0">
+            <a:pPr marL="0" indent="0">
               <a:buNone/>
             </a:pPr>
             <a:r>
@@ -15895,7 +15642,7 @@
           <a:bodyPr wrap="square" rtlCol="0" anchor="ctr"/>
           <a:lstStyle/>
           <a:p>
-            <a:pPr indent="0" marL="0">
+            <a:pPr marL="0" indent="0">
               <a:buNone/>
             </a:pPr>
             <a:r>
@@ -15934,7 +15681,7 @@
           <a:bodyPr wrap="square" rtlCol="0" anchor="ctr"/>
           <a:lstStyle/>
           <a:p>
-            <a:pPr indent="0" marL="0">
+            <a:pPr marL="0" indent="0">
               <a:buNone/>
             </a:pPr>
             <a:r>
@@ -15973,7 +15720,7 @@
           <a:bodyPr wrap="square" rtlCol="0" anchor="ctr"/>
           <a:lstStyle/>
           <a:p>
-            <a:pPr indent="0" marL="0">
+            <a:pPr marL="0" indent="0">
               <a:buNone/>
             </a:pPr>
             <a:r>
@@ -16012,7 +15759,7 @@
           <a:bodyPr wrap="square" rtlCol="0" anchor="ctr"/>
           <a:lstStyle/>
           <a:p>
-            <a:pPr indent="0" marL="0">
+            <a:pPr marL="0" indent="0">
               <a:buNone/>
             </a:pPr>
             <a:r>
@@ -16071,7 +15818,7 @@
           <a:bodyPr wrap="square" rtlCol="0" anchor="ctr"/>
           <a:lstStyle/>
           <a:p>
-            <a:pPr indent="0" marL="0">
+            <a:pPr marL="0" indent="0">
               <a:buNone/>
             </a:pPr>
             <a:r>
@@ -16110,7 +15857,7 @@
           <a:bodyPr wrap="square" rtlCol="0" anchor="ctr"/>
           <a:lstStyle/>
           <a:p>
-            <a:pPr indent="0" marL="0">
+            <a:pPr marL="0" indent="0">
               <a:buNone/>
             </a:pPr>
             <a:r>
@@ -16127,7 +15874,7 @@
             <a:endParaRPr lang="en-US" sz="800" dirty="0"/>
           </a:p>
           <a:p>
-            <a:pPr indent="0" marL="0">
+            <a:pPr marL="0" indent="0">
               <a:buNone/>
             </a:pPr>
             <a:r>
@@ -16144,7 +15891,7 @@
             <a:endParaRPr lang="en-US" sz="800" dirty="0"/>
           </a:p>
           <a:p>
-            <a:pPr indent="0" marL="0">
+            <a:pPr marL="0" indent="0">
               <a:buNone/>
             </a:pPr>
             <a:r>
@@ -16161,7 +15908,7 @@
             <a:endParaRPr lang="en-US" sz="800" dirty="0"/>
           </a:p>
           <a:p>
-            <a:pPr indent="0" marL="0">
+            <a:pPr marL="0" indent="0">
               <a:buNone/>
             </a:pPr>
             <a:r>
@@ -16178,7 +15925,7 @@
             <a:endParaRPr lang="en-US" sz="800" dirty="0"/>
           </a:p>
           <a:p>
-            <a:pPr indent="0" marL="0">
+            <a:pPr marL="0" indent="0">
               <a:buNone/>
             </a:pPr>
             <a:r>
@@ -16217,7 +15964,7 @@
           <a:bodyPr wrap="square" rtlCol="0" anchor="ctr"/>
           <a:lstStyle/>
           <a:p>
-            <a:pPr indent="0" marL="0">
+            <a:pPr marL="0" indent="0">
               <a:buNone/>
             </a:pPr>
             <a:r>
@@ -16234,7 +15981,7 @@
             <a:endParaRPr lang="en-US" sz="800" dirty="0"/>
           </a:p>
           <a:p>
-            <a:pPr indent="0" marL="0">
+            <a:pPr marL="0" indent="0">
               <a:buNone/>
             </a:pPr>
             <a:r>
@@ -16251,7 +15998,7 @@
             <a:endParaRPr lang="en-US" sz="800" dirty="0"/>
           </a:p>
           <a:p>
-            <a:pPr indent="0" marL="0">
+            <a:pPr marL="0" indent="0">
               <a:buNone/>
             </a:pPr>
             <a:r>
@@ -16268,7 +16015,7 @@
             <a:endParaRPr lang="en-US" sz="800" dirty="0"/>
           </a:p>
           <a:p>
-            <a:pPr indent="0" marL="0">
+            <a:pPr marL="0" indent="0">
               <a:buNone/>
             </a:pPr>
             <a:r>
@@ -16302,6 +16049,7 @@
         <a:solidFill>
           <a:srgbClr val="FFFFFF"/>
         </a:solidFill>
+        <a:effectLst/>
       </p:bgPr>
     </p:bg>
     <p:spTree>
@@ -16359,7 +16107,7 @@
           <a:bodyPr wrap="square" rtlCol="0" anchor="ctr"/>
           <a:lstStyle/>
           <a:p>
-            <a:pPr indent="0" marL="0">
+            <a:pPr marL="0" indent="0">
               <a:buNone/>
             </a:pPr>
             <a:r>
@@ -16398,7 +16146,7 @@
           <a:bodyPr wrap="square" rtlCol="0" anchor="ctr"/>
           <a:lstStyle/>
           <a:p>
-            <a:pPr indent="0" marL="0">
+            <a:pPr marL="0" indent="0">
               <a:buNone/>
             </a:pPr>
             <a:r>
@@ -16462,7 +16210,7 @@
           <a:bodyPr wrap="square" rtlCol="0" anchor="ctr"/>
           <a:lstStyle/>
           <a:p>
-            <a:pPr indent="0" marL="0">
+            <a:pPr marL="0" indent="0">
               <a:buNone/>
             </a:pPr>
             <a:r>
@@ -16501,7 +16249,7 @@
           <a:bodyPr wrap="square" rtlCol="0" anchor="ctr"/>
           <a:lstStyle/>
           <a:p>
-            <a:pPr indent="0" marL="0">
+            <a:pPr marL="0" indent="0">
               <a:buNone/>
             </a:pPr>
             <a:r>
@@ -16540,7 +16288,7 @@
           <a:bodyPr wrap="square" rtlCol="0" anchor="ctr"/>
           <a:lstStyle/>
           <a:p>
-            <a:pPr indent="0" marL="0">
+            <a:pPr marL="0" indent="0">
               <a:buNone/>
             </a:pPr>
             <a:r>
@@ -16579,7 +16327,7 @@
           <a:bodyPr wrap="square" rtlCol="0" anchor="ctr"/>
           <a:lstStyle/>
           <a:p>
-            <a:pPr indent="0" marL="0">
+            <a:pPr marL="0" indent="0">
               <a:buNone/>
             </a:pPr>
             <a:r>
@@ -16618,7 +16366,7 @@
           <a:bodyPr wrap="square" rtlCol="0" anchor="ctr"/>
           <a:lstStyle/>
           <a:p>
-            <a:pPr indent="0" marL="0">
+            <a:pPr marL="0" indent="0">
               <a:buNone/>
             </a:pPr>
             <a:r>
@@ -16657,7 +16405,7 @@
           <a:bodyPr wrap="square" rtlCol="0" anchor="ctr"/>
           <a:lstStyle/>
           <a:p>
-            <a:pPr indent="0" marL="0">
+            <a:pPr marL="0" indent="0">
               <a:buNone/>
             </a:pPr>
             <a:r>
@@ -16696,7 +16444,7 @@
           <a:bodyPr wrap="square" rtlCol="0" anchor="ctr"/>
           <a:lstStyle/>
           <a:p>
-            <a:pPr indent="0" marL="0">
+            <a:pPr marL="0" indent="0">
               <a:buNone/>
             </a:pPr>
             <a:r>
@@ -16735,7 +16483,7 @@
           <a:bodyPr wrap="square" rtlCol="0" anchor="ctr"/>
           <a:lstStyle/>
           <a:p>
-            <a:pPr indent="0" marL="0">
+            <a:pPr marL="0" indent="0">
               <a:buNone/>
             </a:pPr>
             <a:r>
@@ -16752,7 +16500,7 @@
             <a:endParaRPr lang="en-US" sz="750" dirty="0"/>
           </a:p>
           <a:p>
-            <a:pPr indent="0" marL="0">
+            <a:pPr marL="0" indent="0">
               <a:buNone/>
             </a:pPr>
             <a:r>
@@ -16769,7 +16517,7 @@
             <a:endParaRPr lang="en-US" sz="750" dirty="0"/>
           </a:p>
           <a:p>
-            <a:pPr indent="0" marL="0">
+            <a:pPr marL="0" indent="0">
               <a:buNone/>
             </a:pPr>
             <a:r>
@@ -16786,7 +16534,7 @@
             <a:endParaRPr lang="en-US" sz="750" dirty="0"/>
           </a:p>
           <a:p>
-            <a:pPr indent="0" marL="0">
+            <a:pPr marL="0" indent="0">
               <a:buNone/>
             </a:pPr>
             <a:r>
@@ -16845,7 +16593,7 @@
           <a:bodyPr wrap="square" rtlCol="0" anchor="ctr"/>
           <a:lstStyle/>
           <a:p>
-            <a:pPr indent="0" marL="0">
+            <a:pPr marL="0" indent="0">
               <a:buNone/>
             </a:pPr>
             <a:r>
@@ -16887,7 +16635,7 @@
             <a:prstDash val="solid"/>
           </a:ln>
           <a:effectLst>
-            <a:outerShdw sx="100000" sy="100000" kx="0" ky="0" algn="bl" rotWithShape="0" blurRad="63500" dist="25400" dir="8100000">
+            <a:outerShdw blurRad="63500" dist="25400" dir="8100000" algn="bl" rotWithShape="0">
               <a:srgbClr val="000000">
                 <a:alpha val="12000"/>
               </a:srgbClr>
@@ -16936,7 +16684,7 @@
           <a:bodyPr wrap="square" rtlCol="0" anchor="ctr"/>
           <a:lstStyle/>
           <a:p>
-            <a:pPr indent="0" marL="0">
+            <a:pPr marL="0" indent="0">
               <a:buNone/>
             </a:pPr>
             <a:r>
@@ -16975,7 +16723,7 @@
           <a:bodyPr wrap="square" rtlCol="0" anchor="ctr"/>
           <a:lstStyle/>
           <a:p>
-            <a:pPr indent="0" marL="0">
+            <a:pPr marL="0" indent="0">
               <a:buNone/>
             </a:pPr>
             <a:r>
@@ -17014,7 +16762,7 @@
           <a:bodyPr wrap="square" rtlCol="0" anchor="ctr"/>
           <a:lstStyle/>
           <a:p>
-            <a:pPr indent="0" marL="0">
+            <a:pPr marL="0" indent="0">
               <a:buNone/>
             </a:pPr>
             <a:r>
@@ -17053,7 +16801,7 @@
           <a:bodyPr wrap="square" rtlCol="0" anchor="ctr"/>
           <a:lstStyle/>
           <a:p>
-            <a:pPr indent="0" marL="0">
+            <a:pPr marL="0" indent="0">
               <a:buNone/>
             </a:pPr>
             <a:r>
@@ -17092,7 +16840,7 @@
           <a:bodyPr wrap="square" rtlCol="0" anchor="ctr"/>
           <a:lstStyle/>
           <a:p>
-            <a:pPr indent="0" marL="0">
+            <a:pPr marL="0" indent="0">
               <a:buNone/>
             </a:pPr>
             <a:r>
@@ -17131,7 +16879,7 @@
           <a:bodyPr wrap="square" rtlCol="0" anchor="ctr"/>
           <a:lstStyle/>
           <a:p>
-            <a:pPr indent="0" marL="0">
+            <a:pPr marL="0" indent="0">
               <a:buNone/>
             </a:pPr>
             <a:r>
@@ -17170,7 +16918,7 @@
           <a:bodyPr wrap="square" rtlCol="0" anchor="ctr"/>
           <a:lstStyle/>
           <a:p>
-            <a:pPr indent="0" marL="0">
+            <a:pPr marL="0" indent="0">
               <a:buNone/>
             </a:pPr>
             <a:r>
@@ -17209,7 +16957,7 @@
           <a:bodyPr wrap="square" rtlCol="0" anchor="ctr"/>
           <a:lstStyle/>
           <a:p>
-            <a:pPr indent="0" marL="0">
+            <a:pPr marL="0" indent="0">
               <a:buNone/>
             </a:pPr>
             <a:r>
@@ -17248,7 +16996,7 @@
           <a:bodyPr wrap="square" rtlCol="0" anchor="ctr"/>
           <a:lstStyle/>
           <a:p>
-            <a:pPr indent="0" marL="0">
+            <a:pPr marL="0" indent="0">
               <a:buNone/>
             </a:pPr>
             <a:r>
@@ -17287,7 +17035,7 @@
           <a:bodyPr wrap="square" rtlCol="0" anchor="ctr"/>
           <a:lstStyle/>
           <a:p>
-            <a:pPr indent="0" marL="0">
+            <a:pPr marL="0" indent="0">
               <a:buNone/>
             </a:pPr>
             <a:r>
@@ -17326,7 +17074,7 @@
           <a:bodyPr wrap="square" rtlCol="0" anchor="ctr"/>
           <a:lstStyle/>
           <a:p>
-            <a:pPr indent="0" marL="0">
+            <a:pPr marL="0" indent="0">
               <a:buNone/>
             </a:pPr>
             <a:r>
@@ -17385,7 +17133,7 @@
           <a:bodyPr wrap="square" rtlCol="0" anchor="ctr"/>
           <a:lstStyle/>
           <a:p>
-            <a:pPr indent="0" marL="0">
+            <a:pPr marL="0" indent="0">
               <a:buNone/>
             </a:pPr>
             <a:r>
@@ -17424,7 +17172,7 @@
           <a:bodyPr wrap="square" rtlCol="0" anchor="ctr"/>
           <a:lstStyle/>
           <a:p>
-            <a:pPr indent="0" marL="0">
+            <a:pPr marL="0" indent="0">
               <a:buNone/>
             </a:pPr>
             <a:r>
@@ -17441,7 +17189,7 @@
             <a:endParaRPr lang="en-US" sz="800" dirty="0"/>
           </a:p>
           <a:p>
-            <a:pPr indent="0" marL="0">
+            <a:pPr marL="0" indent="0">
               <a:buNone/>
             </a:pPr>
             <a:r>
@@ -17458,7 +17206,7 @@
             <a:endParaRPr lang="en-US" sz="800" dirty="0"/>
           </a:p>
           <a:p>
-            <a:pPr indent="0" marL="0">
+            <a:pPr marL="0" indent="0">
               <a:buNone/>
             </a:pPr>
             <a:r>
@@ -17475,7 +17223,7 @@
             <a:endParaRPr lang="en-US" sz="800" dirty="0"/>
           </a:p>
           <a:p>
-            <a:pPr indent="0" marL="0">
+            <a:pPr marL="0" indent="0">
               <a:buNone/>
             </a:pPr>
             <a:r>
@@ -17514,7 +17262,7 @@
           <a:bodyPr wrap="square" rtlCol="0" anchor="ctr"/>
           <a:lstStyle/>
           <a:p>
-            <a:pPr indent="0" marL="0">
+            <a:pPr marL="0" indent="0">
               <a:buNone/>
             </a:pPr>
             <a:r>
@@ -17531,7 +17279,7 @@
             <a:endParaRPr lang="en-US" sz="800" dirty="0"/>
           </a:p>
           <a:p>
-            <a:pPr indent="0" marL="0">
+            <a:pPr marL="0" indent="0">
               <a:buNone/>
             </a:pPr>
             <a:r>
@@ -17548,7 +17296,7 @@
             <a:endParaRPr lang="en-US" sz="800" dirty="0"/>
           </a:p>
           <a:p>
-            <a:pPr indent="0" marL="0">
+            <a:pPr marL="0" indent="0">
               <a:buNone/>
             </a:pPr>
             <a:r>
@@ -17582,6 +17330,7 @@
         <a:solidFill>
           <a:srgbClr val="FFFFFF"/>
         </a:solidFill>
+        <a:effectLst/>
       </p:bgPr>
     </p:bg>
     <p:spTree>
@@ -17639,7 +17388,7 @@
           <a:bodyPr wrap="square" rtlCol="0" anchor="ctr"/>
           <a:lstStyle/>
           <a:p>
-            <a:pPr indent="0" marL="0">
+            <a:pPr marL="0" indent="0">
               <a:buNone/>
             </a:pPr>
             <a:r>
@@ -17678,7 +17427,7 @@
           <a:bodyPr wrap="square" rtlCol="0" anchor="ctr"/>
           <a:lstStyle/>
           <a:p>
-            <a:pPr indent="0" marL="0">
+            <a:pPr marL="0" indent="0">
               <a:buNone/>
             </a:pPr>
             <a:r>
@@ -17742,7 +17491,7 @@
           <a:bodyPr wrap="square" rtlCol="0" anchor="ctr"/>
           <a:lstStyle/>
           <a:p>
-            <a:pPr indent="0" marL="0">
+            <a:pPr marL="0" indent="0">
               <a:buNone/>
             </a:pPr>
             <a:r>
@@ -17781,7 +17530,7 @@
           <a:bodyPr wrap="square" rtlCol="0" anchor="ctr"/>
           <a:lstStyle/>
           <a:p>
-            <a:pPr indent="0" marL="0">
+            <a:pPr marL="0" indent="0">
               <a:buNone/>
             </a:pPr>
             <a:r>
@@ -17820,7 +17569,7 @@
           <a:bodyPr wrap="square" rtlCol="0" anchor="ctr"/>
           <a:lstStyle/>
           <a:p>
-            <a:pPr indent="0" marL="0">
+            <a:pPr marL="0" indent="0">
               <a:buNone/>
             </a:pPr>
             <a:r>
@@ -17859,7 +17608,7 @@
           <a:bodyPr wrap="square" rtlCol="0" anchor="ctr"/>
           <a:lstStyle/>
           <a:p>
-            <a:pPr indent="0" marL="0">
+            <a:pPr marL="0" indent="0">
               <a:buNone/>
             </a:pPr>
             <a:r>
@@ -17898,7 +17647,7 @@
           <a:bodyPr wrap="square" rtlCol="0" anchor="ctr"/>
           <a:lstStyle/>
           <a:p>
-            <a:pPr indent="0" marL="0">
+            <a:pPr marL="0" indent="0">
               <a:buNone/>
             </a:pPr>
             <a:r>
@@ -17937,7 +17686,7 @@
           <a:bodyPr wrap="square" rtlCol="0" anchor="ctr"/>
           <a:lstStyle/>
           <a:p>
-            <a:pPr indent="0" marL="0">
+            <a:pPr marL="0" indent="0">
               <a:buNone/>
             </a:pPr>
             <a:r>
@@ -17976,7 +17725,7 @@
           <a:bodyPr wrap="square" rtlCol="0" anchor="ctr"/>
           <a:lstStyle/>
           <a:p>
-            <a:pPr indent="0" marL="0">
+            <a:pPr marL="0" indent="0">
               <a:buNone/>
             </a:pPr>
             <a:r>
@@ -18015,7 +17764,7 @@
           <a:bodyPr wrap="square" rtlCol="0" anchor="ctr"/>
           <a:lstStyle/>
           <a:p>
-            <a:pPr indent="0" marL="0">
+            <a:pPr marL="0" indent="0">
               <a:buNone/>
             </a:pPr>
             <a:r>
@@ -18032,7 +17781,7 @@
             <a:endParaRPr lang="en-US" sz="750" dirty="0"/>
           </a:p>
           <a:p>
-            <a:pPr indent="0" marL="0">
+            <a:pPr marL="0" indent="0">
               <a:buNone/>
             </a:pPr>
             <a:r>
@@ -18049,7 +17798,7 @@
             <a:endParaRPr lang="en-US" sz="750" dirty="0"/>
           </a:p>
           <a:p>
-            <a:pPr indent="0" marL="0">
+            <a:pPr marL="0" indent="0">
               <a:buNone/>
             </a:pPr>
             <a:r>
@@ -18066,7 +17815,7 @@
             <a:endParaRPr lang="en-US" sz="750" dirty="0"/>
           </a:p>
           <a:p>
-            <a:pPr indent="0" marL="0">
+            <a:pPr marL="0" indent="0">
               <a:buNone/>
             </a:pPr>
             <a:r>
@@ -18125,7 +17874,7 @@
           <a:bodyPr wrap="square" rtlCol="0" anchor="ctr"/>
           <a:lstStyle/>
           <a:p>
-            <a:pPr indent="0" marL="0">
+            <a:pPr marL="0" indent="0">
               <a:buNone/>
             </a:pPr>
             <a:r>
@@ -18167,7 +17916,7 @@
             <a:prstDash val="solid"/>
           </a:ln>
           <a:effectLst>
-            <a:outerShdw sx="100000" sy="100000" kx="0" ky="0" algn="bl" rotWithShape="0" blurRad="63500" dist="25400" dir="8100000">
+            <a:outerShdw blurRad="63500" dist="25400" dir="8100000" algn="bl" rotWithShape="0">
               <a:srgbClr val="000000">
                 <a:alpha val="12000"/>
               </a:srgbClr>
@@ -18216,7 +17965,7 @@
           <a:bodyPr wrap="square" rtlCol="0" anchor="ctr"/>
           <a:lstStyle/>
           <a:p>
-            <a:pPr indent="0" marL="0">
+            <a:pPr marL="0" indent="0">
               <a:buNone/>
             </a:pPr>
             <a:r>
@@ -18255,7 +18004,7 @@
           <a:bodyPr wrap="square" rtlCol="0" anchor="ctr"/>
           <a:lstStyle/>
           <a:p>
-            <a:pPr indent="0" marL="0">
+            <a:pPr marL="0" indent="0">
               <a:buNone/>
             </a:pPr>
             <a:r>
@@ -18294,7 +18043,7 @@
           <a:bodyPr wrap="square" rtlCol="0" anchor="ctr"/>
           <a:lstStyle/>
           <a:p>
-            <a:pPr indent="0" marL="0">
+            <a:pPr marL="0" indent="0">
               <a:buNone/>
             </a:pPr>
             <a:r>
@@ -18333,7 +18082,7 @@
           <a:bodyPr wrap="square" rtlCol="0" anchor="ctr"/>
           <a:lstStyle/>
           <a:p>
-            <a:pPr indent="0" marL="0">
+            <a:pPr marL="0" indent="0">
               <a:buNone/>
             </a:pPr>
             <a:r>
@@ -18372,7 +18121,7 @@
           <a:bodyPr wrap="square" rtlCol="0" anchor="ctr"/>
           <a:lstStyle/>
           <a:p>
-            <a:pPr indent="0" marL="0">
+            <a:pPr marL="0" indent="0">
               <a:buNone/>
             </a:pPr>
             <a:r>
@@ -18411,7 +18160,7 @@
           <a:bodyPr wrap="square" rtlCol="0" anchor="ctr"/>
           <a:lstStyle/>
           <a:p>
-            <a:pPr indent="0" marL="0">
+            <a:pPr marL="0" indent="0">
               <a:buNone/>
             </a:pPr>
             <a:r>
@@ -18450,7 +18199,7 @@
           <a:bodyPr wrap="square" rtlCol="0" anchor="ctr"/>
           <a:lstStyle/>
           <a:p>
-            <a:pPr indent="0" marL="0">
+            <a:pPr marL="0" indent="0">
               <a:buNone/>
             </a:pPr>
             <a:r>
@@ -18489,7 +18238,7 @@
           <a:bodyPr wrap="square" rtlCol="0" anchor="ctr"/>
           <a:lstStyle/>
           <a:p>
-            <a:pPr indent="0" marL="0">
+            <a:pPr marL="0" indent="0">
               <a:buNone/>
             </a:pPr>
             <a:r>
@@ -18528,7 +18277,7 @@
           <a:bodyPr wrap="square" rtlCol="0" anchor="ctr"/>
           <a:lstStyle/>
           <a:p>
-            <a:pPr indent="0" marL="0">
+            <a:pPr marL="0" indent="0">
               <a:buNone/>
             </a:pPr>
             <a:r>
@@ -18567,7 +18316,7 @@
           <a:bodyPr wrap="square" rtlCol="0" anchor="ctr"/>
           <a:lstStyle/>
           <a:p>
-            <a:pPr indent="0" marL="0">
+            <a:pPr marL="0" indent="0">
               <a:buNone/>
             </a:pPr>
             <a:r>
@@ -18626,7 +18375,7 @@
           <a:bodyPr wrap="square" rtlCol="0" anchor="ctr"/>
           <a:lstStyle/>
           <a:p>
-            <a:pPr indent="0" marL="0">
+            <a:pPr marL="0" indent="0">
               <a:buNone/>
             </a:pPr>
             <a:r>
@@ -18665,7 +18414,7 @@
           <a:bodyPr wrap="square" rtlCol="0" anchor="ctr"/>
           <a:lstStyle/>
           <a:p>
-            <a:pPr indent="0" marL="0">
+            <a:pPr marL="0" indent="0">
               <a:buNone/>
             </a:pPr>
             <a:r>
@@ -18682,7 +18431,7 @@
             <a:endParaRPr lang="en-US" sz="800" dirty="0"/>
           </a:p>
           <a:p>
-            <a:pPr indent="0" marL="0">
+            <a:pPr marL="0" indent="0">
               <a:buNone/>
             </a:pPr>
             <a:r>
@@ -18699,7 +18448,7 @@
             <a:endParaRPr lang="en-US" sz="800" dirty="0"/>
           </a:p>
           <a:p>
-            <a:pPr indent="0" marL="0">
+            <a:pPr marL="0" indent="0">
               <a:buNone/>
             </a:pPr>
             <a:r>
@@ -18716,7 +18465,7 @@
             <a:endParaRPr lang="en-US" sz="800" dirty="0"/>
           </a:p>
           <a:p>
-            <a:pPr indent="0" marL="0">
+            <a:pPr marL="0" indent="0">
               <a:buNone/>
             </a:pPr>
             <a:r>
@@ -18755,7 +18504,7 @@
           <a:bodyPr wrap="square" rtlCol="0" anchor="ctr"/>
           <a:lstStyle/>
           <a:p>
-            <a:pPr indent="0" marL="0">
+            <a:pPr marL="0" indent="0">
               <a:buNone/>
             </a:pPr>
             <a:r>
@@ -18772,7 +18521,7 @@
             <a:endParaRPr lang="en-US" sz="800" dirty="0"/>
           </a:p>
           <a:p>
-            <a:pPr indent="0" marL="0">
+            <a:pPr marL="0" indent="0">
               <a:buNone/>
             </a:pPr>
             <a:r>
@@ -18789,7 +18538,7 @@
             <a:endParaRPr lang="en-US" sz="800" dirty="0"/>
           </a:p>
           <a:p>
-            <a:pPr indent="0" marL="0">
+            <a:pPr marL="0" indent="0">
               <a:buNone/>
             </a:pPr>
             <a:r>
@@ -18823,6 +18572,7 @@
         <a:solidFill>
           <a:srgbClr val="FFFFFF"/>
         </a:solidFill>
+        <a:effectLst/>
       </p:bgPr>
     </p:bg>
     <p:spTree>
@@ -18880,7 +18630,7 @@
           <a:bodyPr wrap="square" rtlCol="0" anchor="ctr"/>
           <a:lstStyle/>
           <a:p>
-            <a:pPr indent="0" marL="0">
+            <a:pPr marL="0" indent="0">
               <a:buNone/>
             </a:pPr>
             <a:r>
@@ -18919,7 +18669,7 @@
           <a:bodyPr wrap="square" rtlCol="0" anchor="ctr"/>
           <a:lstStyle/>
           <a:p>
-            <a:pPr indent="0" marL="0">
+            <a:pPr marL="0" indent="0">
               <a:buNone/>
             </a:pPr>
             <a:r>
@@ -18983,7 +18733,7 @@
           <a:bodyPr wrap="square" rtlCol="0" anchor="ctr"/>
           <a:lstStyle/>
           <a:p>
-            <a:pPr indent="0" marL="0">
+            <a:pPr marL="0" indent="0">
               <a:buNone/>
             </a:pPr>
             <a:r>
@@ -19022,7 +18772,7 @@
           <a:bodyPr wrap="square" rtlCol="0" anchor="ctr"/>
           <a:lstStyle/>
           <a:p>
-            <a:pPr indent="0" marL="0">
+            <a:pPr marL="0" indent="0">
               <a:buNone/>
             </a:pPr>
             <a:r>
@@ -19061,7 +18811,7 @@
           <a:bodyPr wrap="square" rtlCol="0" anchor="ctr"/>
           <a:lstStyle/>
           <a:p>
-            <a:pPr indent="0" marL="0">
+            <a:pPr marL="0" indent="0">
               <a:buNone/>
             </a:pPr>
             <a:r>
@@ -19100,7 +18850,7 @@
           <a:bodyPr wrap="square" rtlCol="0" anchor="ctr"/>
           <a:lstStyle/>
           <a:p>
-            <a:pPr indent="0" marL="0">
+            <a:pPr marL="0" indent="0">
               <a:buNone/>
             </a:pPr>
             <a:r>
@@ -19139,7 +18889,7 @@
           <a:bodyPr wrap="square" rtlCol="0" anchor="ctr"/>
           <a:lstStyle/>
           <a:p>
-            <a:pPr indent="0" marL="0">
+            <a:pPr marL="0" indent="0">
               <a:buNone/>
             </a:pPr>
             <a:r>
@@ -19178,7 +18928,7 @@
           <a:bodyPr wrap="square" rtlCol="0" anchor="ctr"/>
           <a:lstStyle/>
           <a:p>
-            <a:pPr indent="0" marL="0">
+            <a:pPr marL="0" indent="0">
               <a:buNone/>
             </a:pPr>
             <a:r>
@@ -19217,7 +18967,7 @@
           <a:bodyPr wrap="square" rtlCol="0" anchor="ctr"/>
           <a:lstStyle/>
           <a:p>
-            <a:pPr indent="0" marL="0">
+            <a:pPr marL="0" indent="0">
               <a:buNone/>
             </a:pPr>
             <a:r>
@@ -19256,7 +19006,7 @@
           <a:bodyPr wrap="square" rtlCol="0" anchor="ctr"/>
           <a:lstStyle/>
           <a:p>
-            <a:pPr indent="0" marL="0">
+            <a:pPr marL="0" indent="0">
               <a:buNone/>
             </a:pPr>
             <a:r>
@@ -19273,7 +19023,7 @@
             <a:endParaRPr lang="en-US" sz="750" dirty="0"/>
           </a:p>
           <a:p>
-            <a:pPr indent="0" marL="0">
+            <a:pPr marL="0" indent="0">
               <a:buNone/>
             </a:pPr>
             <a:r>
@@ -19290,7 +19040,7 @@
             <a:endParaRPr lang="en-US" sz="750" dirty="0"/>
           </a:p>
           <a:p>
-            <a:pPr indent="0" marL="0">
+            <a:pPr marL="0" indent="0">
               <a:buNone/>
             </a:pPr>
             <a:r>
@@ -19307,7 +19057,7 @@
             <a:endParaRPr lang="en-US" sz="750" dirty="0"/>
           </a:p>
           <a:p>
-            <a:pPr indent="0" marL="0">
+            <a:pPr marL="0" indent="0">
               <a:buNone/>
             </a:pPr>
             <a:r>
@@ -19366,7 +19116,7 @@
           <a:bodyPr wrap="square" rtlCol="0" anchor="ctr"/>
           <a:lstStyle/>
           <a:p>
-            <a:pPr indent="0" marL="0">
+            <a:pPr marL="0" indent="0">
               <a:buNone/>
             </a:pPr>
             <a:r>
@@ -19408,7 +19158,7 @@
             <a:prstDash val="solid"/>
           </a:ln>
           <a:effectLst>
-            <a:outerShdw sx="100000" sy="100000" kx="0" ky="0" algn="bl" rotWithShape="0" blurRad="63500" dist="25400" dir="8100000">
+            <a:outerShdw blurRad="63500" dist="25400" dir="8100000" algn="bl" rotWithShape="0">
               <a:srgbClr val="000000">
                 <a:alpha val="12000"/>
               </a:srgbClr>
@@ -19457,7 +19207,7 @@
           <a:bodyPr wrap="square" rtlCol="0" anchor="ctr"/>
           <a:lstStyle/>
           <a:p>
-            <a:pPr indent="0" marL="0">
+            <a:pPr marL="0" indent="0">
               <a:buNone/>
             </a:pPr>
             <a:r>
@@ -19496,7 +19246,7 @@
           <a:bodyPr wrap="square" rtlCol="0" anchor="ctr"/>
           <a:lstStyle/>
           <a:p>
-            <a:pPr indent="0" marL="0">
+            <a:pPr marL="0" indent="0">
               <a:buNone/>
             </a:pPr>
             <a:r>
@@ -19535,7 +19285,7 @@
           <a:bodyPr wrap="square" rtlCol="0" anchor="ctr"/>
           <a:lstStyle/>
           <a:p>
-            <a:pPr indent="0" marL="0">
+            <a:pPr marL="0" indent="0">
               <a:buNone/>
             </a:pPr>
             <a:r>
@@ -19574,7 +19324,7 @@
           <a:bodyPr wrap="square" rtlCol="0" anchor="ctr"/>
           <a:lstStyle/>
           <a:p>
-            <a:pPr indent="0" marL="0">
+            <a:pPr marL="0" indent="0">
               <a:buNone/>
             </a:pPr>
             <a:r>
@@ -19613,7 +19363,7 @@
           <a:bodyPr wrap="square" rtlCol="0" anchor="ctr"/>
           <a:lstStyle/>
           <a:p>
-            <a:pPr indent="0" marL="0">
+            <a:pPr marL="0" indent="0">
               <a:buNone/>
             </a:pPr>
             <a:r>
@@ -19652,7 +19402,7 @@
           <a:bodyPr wrap="square" rtlCol="0" anchor="ctr"/>
           <a:lstStyle/>
           <a:p>
-            <a:pPr indent="0" marL="0">
+            <a:pPr marL="0" indent="0">
               <a:buNone/>
             </a:pPr>
             <a:r>
@@ -19691,7 +19441,7 @@
           <a:bodyPr wrap="square" rtlCol="0" anchor="ctr"/>
           <a:lstStyle/>
           <a:p>
-            <a:pPr indent="0" marL="0">
+            <a:pPr marL="0" indent="0">
               <a:buNone/>
             </a:pPr>
             <a:r>
@@ -19730,7 +19480,7 @@
           <a:bodyPr wrap="square" rtlCol="0" anchor="ctr"/>
           <a:lstStyle/>
           <a:p>
-            <a:pPr indent="0" marL="0">
+            <a:pPr marL="0" indent="0">
               <a:buNone/>
             </a:pPr>
             <a:r>
@@ -19769,7 +19519,7 @@
           <a:bodyPr wrap="square" rtlCol="0" anchor="ctr"/>
           <a:lstStyle/>
           <a:p>
-            <a:pPr indent="0" marL="0">
+            <a:pPr marL="0" indent="0">
               <a:buNone/>
             </a:pPr>
             <a:r>
@@ -19808,7 +19558,7 @@
           <a:bodyPr wrap="square" rtlCol="0" anchor="ctr"/>
           <a:lstStyle/>
           <a:p>
-            <a:pPr indent="0" marL="0">
+            <a:pPr marL="0" indent="0">
               <a:buNone/>
             </a:pPr>
             <a:r>
@@ -19847,7 +19597,7 @@
           <a:bodyPr wrap="square" rtlCol="0" anchor="ctr"/>
           <a:lstStyle/>
           <a:p>
-            <a:pPr indent="0" marL="0">
+            <a:pPr marL="0" indent="0">
               <a:buNone/>
             </a:pPr>
             <a:r>
@@ -19906,7 +19656,7 @@
           <a:bodyPr wrap="square" rtlCol="0" anchor="ctr"/>
           <a:lstStyle/>
           <a:p>
-            <a:pPr indent="0" marL="0">
+            <a:pPr marL="0" indent="0">
               <a:buNone/>
             </a:pPr>
             <a:r>
@@ -19945,7 +19695,7 @@
           <a:bodyPr wrap="square" rtlCol="0" anchor="ctr"/>
           <a:lstStyle/>
           <a:p>
-            <a:pPr indent="0" marL="0">
+            <a:pPr marL="0" indent="0">
               <a:buNone/>
             </a:pPr>
             <a:r>
@@ -19962,7 +19712,7 @@
             <a:endParaRPr lang="en-US" sz="800" dirty="0"/>
           </a:p>
           <a:p>
-            <a:pPr indent="0" marL="0">
+            <a:pPr marL="0" indent="0">
               <a:buNone/>
             </a:pPr>
             <a:r>
@@ -19979,7 +19729,7 @@
             <a:endParaRPr lang="en-US" sz="800" dirty="0"/>
           </a:p>
           <a:p>
-            <a:pPr indent="0" marL="0">
+            <a:pPr marL="0" indent="0">
               <a:buNone/>
             </a:pPr>
             <a:r>
@@ -19996,7 +19746,7 @@
             <a:endParaRPr lang="en-US" sz="800" dirty="0"/>
           </a:p>
           <a:p>
-            <a:pPr indent="0" marL="0">
+            <a:pPr marL="0" indent="0">
               <a:buNone/>
             </a:pPr>
             <a:r>
@@ -20035,7 +19785,7 @@
           <a:bodyPr wrap="square" rtlCol="0" anchor="ctr"/>
           <a:lstStyle/>
           <a:p>
-            <a:pPr indent="0" marL="0">
+            <a:pPr marL="0" indent="0">
               <a:buNone/>
             </a:pPr>
             <a:r>
@@ -20052,7 +19802,7 @@
             <a:endParaRPr lang="en-US" sz="800" dirty="0"/>
           </a:p>
           <a:p>
-            <a:pPr indent="0" marL="0">
+            <a:pPr marL="0" indent="0">
               <a:buNone/>
             </a:pPr>
             <a:r>
@@ -20069,7 +19819,7 @@
             <a:endParaRPr lang="en-US" sz="800" dirty="0"/>
           </a:p>
           <a:p>
-            <a:pPr indent="0" marL="0">
+            <a:pPr marL="0" indent="0">
               <a:buNone/>
             </a:pPr>
             <a:r>
@@ -20103,6 +19853,7 @@
         <a:solidFill>
           <a:srgbClr val="FFFFFF"/>
         </a:solidFill>
+        <a:effectLst/>
       </p:bgPr>
     </p:bg>
     <p:spTree>
@@ -20160,7 +19911,7 @@
           <a:bodyPr wrap="square" rtlCol="0" anchor="ctr"/>
           <a:lstStyle/>
           <a:p>
-            <a:pPr indent="0" marL="0">
+            <a:pPr marL="0" indent="0">
               <a:buNone/>
             </a:pPr>
             <a:r>
@@ -20199,7 +19950,7 @@
           <a:bodyPr wrap="square" rtlCol="0" anchor="ctr"/>
           <a:lstStyle/>
           <a:p>
-            <a:pPr indent="0" marL="0">
+            <a:pPr marL="0" indent="0">
               <a:buNone/>
             </a:pPr>
             <a:r>
@@ -20263,7 +20014,7 @@
           <a:bodyPr wrap="square" rtlCol="0" anchor="ctr"/>
           <a:lstStyle/>
           <a:p>
-            <a:pPr indent="0" marL="0">
+            <a:pPr marL="0" indent="0">
               <a:buNone/>
             </a:pPr>
             <a:r>
@@ -20302,7 +20053,7 @@
           <a:bodyPr wrap="square" rtlCol="0" anchor="ctr"/>
           <a:lstStyle/>
           <a:p>
-            <a:pPr indent="0" marL="0">
+            <a:pPr marL="0" indent="0">
               <a:buNone/>
             </a:pPr>
             <a:r>
@@ -20341,7 +20092,7 @@
           <a:bodyPr wrap="square" rtlCol="0" anchor="ctr"/>
           <a:lstStyle/>
           <a:p>
-            <a:pPr indent="0" marL="0">
+            <a:pPr marL="0" indent="0">
               <a:buNone/>
             </a:pPr>
             <a:r>
@@ -20380,7 +20131,7 @@
           <a:bodyPr wrap="square" rtlCol="0" anchor="ctr"/>
           <a:lstStyle/>
           <a:p>
-            <a:pPr indent="0" marL="0">
+            <a:pPr marL="0" indent="0">
               <a:buNone/>
             </a:pPr>
             <a:r>
@@ -20419,7 +20170,7 @@
           <a:bodyPr wrap="square" rtlCol="0" anchor="ctr"/>
           <a:lstStyle/>
           <a:p>
-            <a:pPr indent="0" marL="0">
+            <a:pPr marL="0" indent="0">
               <a:buNone/>
             </a:pPr>
             <a:r>
@@ -20458,7 +20209,7 @@
           <a:bodyPr wrap="square" rtlCol="0" anchor="ctr"/>
           <a:lstStyle/>
           <a:p>
-            <a:pPr indent="0" marL="0">
+            <a:pPr marL="0" indent="0">
               <a:buNone/>
             </a:pPr>
             <a:r>
@@ -20497,7 +20248,7 @@
           <a:bodyPr wrap="square" rtlCol="0" anchor="ctr"/>
           <a:lstStyle/>
           <a:p>
-            <a:pPr indent="0" marL="0">
+            <a:pPr marL="0" indent="0">
               <a:buNone/>
             </a:pPr>
             <a:r>
@@ -20536,7 +20287,7 @@
           <a:bodyPr wrap="square" rtlCol="0" anchor="ctr"/>
           <a:lstStyle/>
           <a:p>
-            <a:pPr indent="0" marL="0">
+            <a:pPr marL="0" indent="0">
               <a:buNone/>
             </a:pPr>
             <a:r>
@@ -20553,7 +20304,7 @@
             <a:endParaRPr lang="en-US" sz="750" dirty="0"/>
           </a:p>
           <a:p>
-            <a:pPr indent="0" marL="0">
+            <a:pPr marL="0" indent="0">
               <a:buNone/>
             </a:pPr>
             <a:r>
@@ -20570,7 +20321,7 @@
             <a:endParaRPr lang="en-US" sz="750" dirty="0"/>
           </a:p>
           <a:p>
-            <a:pPr indent="0" marL="0">
+            <a:pPr marL="0" indent="0">
               <a:buNone/>
             </a:pPr>
             <a:r>
@@ -20629,7 +20380,7 @@
           <a:bodyPr wrap="square" rtlCol="0" anchor="ctr"/>
           <a:lstStyle/>
           <a:p>
-            <a:pPr indent="0" marL="0">
+            <a:pPr marL="0" indent="0">
               <a:buNone/>
             </a:pPr>
             <a:r>
@@ -20671,7 +20422,7 @@
             <a:prstDash val="solid"/>
           </a:ln>
           <a:effectLst>
-            <a:outerShdw sx="100000" sy="100000" kx="0" ky="0" algn="bl" rotWithShape="0" blurRad="63500" dist="25400" dir="8100000">
+            <a:outerShdw blurRad="63500" dist="25400" dir="8100000" algn="bl" rotWithShape="0">
               <a:srgbClr val="000000">
                 <a:alpha val="12000"/>
               </a:srgbClr>
@@ -20720,7 +20471,7 @@
           <a:bodyPr wrap="square" rtlCol="0" anchor="ctr"/>
           <a:lstStyle/>
           <a:p>
-            <a:pPr indent="0" marL="0">
+            <a:pPr marL="0" indent="0">
               <a:buNone/>
             </a:pPr>
             <a:r>
@@ -20759,7 +20510,7 @@
           <a:bodyPr wrap="square" rtlCol="0" anchor="ctr"/>
           <a:lstStyle/>
           <a:p>
-            <a:pPr indent="0" marL="0">
+            <a:pPr marL="0" indent="0">
               <a:buNone/>
             </a:pPr>
             <a:r>
@@ -20798,7 +20549,7 @@
           <a:bodyPr wrap="square" rtlCol="0" anchor="ctr"/>
           <a:lstStyle/>
           <a:p>
-            <a:pPr indent="0" marL="0">
+            <a:pPr marL="0" indent="0">
               <a:buNone/>
             </a:pPr>
             <a:r>
@@ -20837,7 +20588,7 @@
           <a:bodyPr wrap="square" rtlCol="0" anchor="ctr"/>
           <a:lstStyle/>
           <a:p>
-            <a:pPr indent="0" marL="0">
+            <a:pPr marL="0" indent="0">
               <a:buNone/>
             </a:pPr>
             <a:r>
@@ -20876,7 +20627,7 @@
           <a:bodyPr wrap="square" rtlCol="0" anchor="ctr"/>
           <a:lstStyle/>
           <a:p>
-            <a:pPr indent="0" marL="0">
+            <a:pPr marL="0" indent="0">
               <a:buNone/>
             </a:pPr>
             <a:r>
@@ -20915,7 +20666,7 @@
           <a:bodyPr wrap="square" rtlCol="0" anchor="ctr"/>
           <a:lstStyle/>
           <a:p>
-            <a:pPr indent="0" marL="0">
+            <a:pPr marL="0" indent="0">
               <a:buNone/>
             </a:pPr>
             <a:r>
@@ -20954,7 +20705,7 @@
           <a:bodyPr wrap="square" rtlCol="0" anchor="ctr"/>
           <a:lstStyle/>
           <a:p>
-            <a:pPr indent="0" marL="0">
+            <a:pPr marL="0" indent="0">
               <a:buNone/>
             </a:pPr>
             <a:r>
@@ -20993,7 +20744,7 @@
           <a:bodyPr wrap="square" rtlCol="0" anchor="ctr"/>
           <a:lstStyle/>
           <a:p>
-            <a:pPr indent="0" marL="0">
+            <a:pPr marL="0" indent="0">
               <a:buNone/>
             </a:pPr>
             <a:r>
@@ -21032,7 +20783,7 @@
           <a:bodyPr wrap="square" rtlCol="0" anchor="ctr"/>
           <a:lstStyle/>
           <a:p>
-            <a:pPr indent="0" marL="0">
+            <a:pPr marL="0" indent="0">
               <a:buNone/>
             </a:pPr>
             <a:r>
@@ -21071,7 +20822,7 @@
           <a:bodyPr wrap="square" rtlCol="0" anchor="ctr"/>
           <a:lstStyle/>
           <a:p>
-            <a:pPr indent="0" marL="0">
+            <a:pPr marL="0" indent="0">
               <a:buNone/>
             </a:pPr>
             <a:r>
@@ -21110,7 +20861,7 @@
           <a:bodyPr wrap="square" rtlCol="0" anchor="ctr"/>
           <a:lstStyle/>
           <a:p>
-            <a:pPr indent="0" marL="0">
+            <a:pPr marL="0" indent="0">
               <a:buNone/>
             </a:pPr>
             <a:r>
@@ -21169,7 +20920,7 @@
           <a:bodyPr wrap="square" rtlCol="0" anchor="ctr"/>
           <a:lstStyle/>
           <a:p>
-            <a:pPr indent="0" marL="0">
+            <a:pPr marL="0" indent="0">
               <a:buNone/>
             </a:pPr>
             <a:r>
@@ -21208,7 +20959,7 @@
           <a:bodyPr wrap="square" rtlCol="0" anchor="ctr"/>
           <a:lstStyle/>
           <a:p>
-            <a:pPr indent="0" marL="0">
+            <a:pPr marL="0" indent="0">
               <a:buNone/>
             </a:pPr>
             <a:r>
@@ -21225,7 +20976,7 @@
             <a:endParaRPr lang="en-US" sz="800" dirty="0"/>
           </a:p>
           <a:p>
-            <a:pPr indent="0" marL="0">
+            <a:pPr marL="0" indent="0">
               <a:buNone/>
             </a:pPr>
             <a:r>
@@ -21242,7 +20993,7 @@
             <a:endParaRPr lang="en-US" sz="800" dirty="0"/>
           </a:p>
           <a:p>
-            <a:pPr indent="0" marL="0">
+            <a:pPr marL="0" indent="0">
               <a:buNone/>
             </a:pPr>
             <a:r>
@@ -21281,7 +21032,7 @@
           <a:bodyPr wrap="square" rtlCol="0" anchor="ctr"/>
           <a:lstStyle/>
           <a:p>
-            <a:pPr indent="0" marL="0">
+            <a:pPr marL="0" indent="0">
               <a:buNone/>
             </a:pPr>
             <a:r>
@@ -21298,7 +21049,7 @@
             <a:endParaRPr lang="en-US" sz="800" dirty="0"/>
           </a:p>
           <a:p>
-            <a:pPr indent="0" marL="0">
+            <a:pPr marL="0" indent="0">
               <a:buNone/>
             </a:pPr>
             <a:r>
@@ -21315,7 +21066,7 @@
             <a:endParaRPr lang="en-US" sz="800" dirty="0"/>
           </a:p>
           <a:p>
-            <a:pPr indent="0" marL="0">
+            <a:pPr marL="0" indent="0">
               <a:buNone/>
             </a:pPr>
             <a:r>
@@ -21634,4 +21385,299 @@
     </a:ext>
   </a:extLst>
 </a:theme>
+</file>
+
+<file path=ppt/theme/theme2.xml><?xml version="1.0" encoding="utf-8"?>
+<a:theme xmlns:a="http://schemas.openxmlformats.org/drawingml/2006/main" name="Office 테마">
+  <a:themeElements>
+    <a:clrScheme name="Office">
+      <a:dk1>
+        <a:sysClr val="windowText" lastClr="000000"/>
+      </a:dk1>
+      <a:lt1>
+        <a:sysClr val="window" lastClr="FFFFFF"/>
+      </a:lt1>
+      <a:dk2>
+        <a:srgbClr val="44546A"/>
+      </a:dk2>
+      <a:lt2>
+        <a:srgbClr val="E7E6E6"/>
+      </a:lt2>
+      <a:accent1>
+        <a:srgbClr val="4472C4"/>
+      </a:accent1>
+      <a:accent2>
+        <a:srgbClr val="ED7D31"/>
+      </a:accent2>
+      <a:accent3>
+        <a:srgbClr val="A5A5A5"/>
+      </a:accent3>
+      <a:accent4>
+        <a:srgbClr val="FFC000"/>
+      </a:accent4>
+      <a:accent5>
+        <a:srgbClr val="5B9BD5"/>
+      </a:accent5>
+      <a:accent6>
+        <a:srgbClr val="70AD47"/>
+      </a:accent6>
+      <a:hlink>
+        <a:srgbClr val="0563C1"/>
+      </a:hlink>
+      <a:folHlink>
+        <a:srgbClr val="954F72"/>
+      </a:folHlink>
+    </a:clrScheme>
+    <a:fontScheme name="Office">
+      <a:majorFont>
+        <a:latin typeface="맑은 고딕" panose="020F0302020204030204"/>
+        <a:ea typeface=""/>
+        <a:cs typeface=""/>
+        <a:font script="Jpan" typeface="游ゴシック Light"/>
+        <a:font script="Hang" typeface="맑은 고딕"/>
+        <a:font script="Hans" typeface="等线 Light"/>
+        <a:font script="Hant" typeface="新細明體"/>
+        <a:font script="Arab" typeface="Times New Roman"/>
+        <a:font script="Hebr" typeface="Times New Roman"/>
+        <a:font script="Thai" typeface="Angsana New"/>
+        <a:font script="Ethi" typeface="Nyala"/>
+        <a:font script="Beng" typeface="Vrinda"/>
+        <a:font script="Gujr" typeface="Shruti"/>
+        <a:font script="Khmr" typeface="MoolBoran"/>
+        <a:font script="Knda" typeface="Tunga"/>
+        <a:font script="Guru" typeface="Raavi"/>
+        <a:font script="Cans" typeface="Euphemia"/>
+        <a:font script="Cher" typeface="Plantagenet Cherokee"/>
+        <a:font script="Yiii" typeface="Microsoft Yi Baiti"/>
+        <a:font script="Tibt" typeface="Microsoft Himalaya"/>
+        <a:font script="Thaa" typeface="MV Boli"/>
+        <a:font script="Deva" typeface="Mangal"/>
+        <a:font script="Telu" typeface="Gautami"/>
+        <a:font script="Taml" typeface="Latha"/>
+        <a:font script="Syrc" typeface="Estrangelo Edessa"/>
+        <a:font script="Orya" typeface="Kalinga"/>
+        <a:font script="Mlym" typeface="Kartika"/>
+        <a:font script="Laoo" typeface="DokChampa"/>
+        <a:font script="Sinh" typeface="Iskoola Pota"/>
+        <a:font script="Mong" typeface="Mongolian Baiti"/>
+        <a:font script="Viet" typeface="Times New Roman"/>
+        <a:font script="Uigh" typeface="Microsoft Uighur"/>
+        <a:font script="Geor" typeface="Sylfaen"/>
+        <a:font script="Armn" typeface="Arial"/>
+        <a:font script="Bugi" typeface="Leelawadee UI"/>
+        <a:font script="Bopo" typeface="Microsoft JhengHei"/>
+        <a:font script="Java" typeface="Javanese Text"/>
+        <a:font script="Lisu" typeface="Segoe UI"/>
+        <a:font script="Mymr" typeface="Myanmar Text"/>
+        <a:font script="Nkoo" typeface="Ebrima"/>
+        <a:font script="Olck" typeface="Nirmala UI"/>
+        <a:font script="Osma" typeface="Ebrima"/>
+        <a:font script="Phag" typeface="Phagspa"/>
+        <a:font script="Syrn" typeface="Estrangelo Edessa"/>
+        <a:font script="Syrj" typeface="Estrangelo Edessa"/>
+        <a:font script="Syre" typeface="Estrangelo Edessa"/>
+        <a:font script="Sora" typeface="Nirmala UI"/>
+        <a:font script="Tale" typeface="Microsoft Tai Le"/>
+        <a:font script="Talu" typeface="Microsoft New Tai Lue"/>
+        <a:font script="Tfng" typeface="Ebrima"/>
+      </a:majorFont>
+      <a:minorFont>
+        <a:latin typeface="맑은 고딕" panose="020F0502020204030204"/>
+        <a:ea typeface=""/>
+        <a:cs typeface=""/>
+        <a:font script="Jpan" typeface="游ゴシック"/>
+        <a:font script="Hang" typeface="맑은 고딕"/>
+        <a:font script="Hans" typeface="等线"/>
+        <a:font script="Hant" typeface="新細明體"/>
+        <a:font script="Arab" typeface="Arial"/>
+        <a:font script="Hebr" typeface="Arial"/>
+        <a:font script="Thai" typeface="Cordia New"/>
+        <a:font script="Ethi" typeface="Nyala"/>
+        <a:font script="Beng" typeface="Vrinda"/>
+        <a:font script="Gujr" typeface="Shruti"/>
+        <a:font script="Khmr" typeface="DaunPenh"/>
+        <a:font script="Knda" typeface="Tunga"/>
+        <a:font script="Guru" typeface="Raavi"/>
+        <a:font script="Cans" typeface="Euphemia"/>
+        <a:font script="Cher" typeface="Plantagenet Cherokee"/>
+        <a:font script="Yiii" typeface="Microsoft Yi Baiti"/>
+        <a:font script="Tibt" typeface="Microsoft Himalaya"/>
+        <a:font script="Thaa" typeface="MV Boli"/>
+        <a:font script="Deva" typeface="Mangal"/>
+        <a:font script="Telu" typeface="Gautami"/>
+        <a:font script="Taml" typeface="Latha"/>
+        <a:font script="Syrc" typeface="Estrangelo Edessa"/>
+        <a:font script="Orya" typeface="Kalinga"/>
+        <a:font script="Mlym" typeface="Kartika"/>
+        <a:font script="Laoo" typeface="DokChampa"/>
+        <a:font script="Sinh" typeface="Iskoola Pota"/>
+        <a:font script="Mong" typeface="Mongolian Baiti"/>
+        <a:font script="Viet" typeface="Arial"/>
+        <a:font script="Uigh" typeface="Microsoft Uighur"/>
+        <a:font script="Geor" typeface="Sylfaen"/>
+        <a:font script="Armn" typeface="Arial"/>
+        <a:font script="Bugi" typeface="Leelawadee UI"/>
+        <a:font script="Bopo" typeface="Microsoft JhengHei"/>
+        <a:font script="Java" typeface="Javanese Text"/>
+        <a:font script="Lisu" typeface="Segoe UI"/>
+        <a:font script="Mymr" typeface="Myanmar Text"/>
+        <a:font script="Nkoo" typeface="Ebrima"/>
+        <a:font script="Olck" typeface="Nirmala UI"/>
+        <a:font script="Osma" typeface="Ebrima"/>
+        <a:font script="Phag" typeface="Phagspa"/>
+        <a:font script="Syrn" typeface="Estrangelo Edessa"/>
+        <a:font script="Syrj" typeface="Estrangelo Edessa"/>
+        <a:font script="Syre" typeface="Estrangelo Edessa"/>
+        <a:font script="Sora" typeface="Nirmala UI"/>
+        <a:font script="Tale" typeface="Microsoft Tai Le"/>
+        <a:font script="Talu" typeface="Microsoft New Tai Lue"/>
+        <a:font script="Tfng" typeface="Ebrima"/>
+      </a:minorFont>
+    </a:fontScheme>
+    <a:fmtScheme name="Office">
+      <a:fillStyleLst>
+        <a:solidFill>
+          <a:schemeClr val="phClr"/>
+        </a:solidFill>
+        <a:gradFill rotWithShape="1">
+          <a:gsLst>
+            <a:gs pos="0">
+              <a:schemeClr val="phClr">
+                <a:lumMod val="110000"/>
+                <a:satMod val="105000"/>
+                <a:tint val="67000"/>
+              </a:schemeClr>
+            </a:gs>
+            <a:gs pos="50000">
+              <a:schemeClr val="phClr">
+                <a:lumMod val="105000"/>
+                <a:satMod val="103000"/>
+                <a:tint val="73000"/>
+              </a:schemeClr>
+            </a:gs>
+            <a:gs pos="100000">
+              <a:schemeClr val="phClr">
+                <a:lumMod val="105000"/>
+                <a:satMod val="109000"/>
+                <a:tint val="81000"/>
+              </a:schemeClr>
+            </a:gs>
+          </a:gsLst>
+          <a:lin ang="5400000" scaled="0"/>
+        </a:gradFill>
+        <a:gradFill rotWithShape="1">
+          <a:gsLst>
+            <a:gs pos="0">
+              <a:schemeClr val="phClr">
+                <a:satMod val="103000"/>
+                <a:lumMod val="102000"/>
+                <a:tint val="94000"/>
+              </a:schemeClr>
+            </a:gs>
+            <a:gs pos="50000">
+              <a:schemeClr val="phClr">
+                <a:satMod val="110000"/>
+                <a:lumMod val="100000"/>
+                <a:shade val="100000"/>
+              </a:schemeClr>
+            </a:gs>
+            <a:gs pos="100000">
+              <a:schemeClr val="phClr">
+                <a:lumMod val="99000"/>
+                <a:satMod val="120000"/>
+                <a:shade val="78000"/>
+              </a:schemeClr>
+            </a:gs>
+          </a:gsLst>
+          <a:lin ang="5400000" scaled="0"/>
+        </a:gradFill>
+      </a:fillStyleLst>
+      <a:lnStyleLst>
+        <a:ln w="6350" cap="flat" cmpd="sng" algn="ctr">
+          <a:solidFill>
+            <a:schemeClr val="phClr"/>
+          </a:solidFill>
+          <a:prstDash val="solid"/>
+          <a:miter lim="800000"/>
+        </a:ln>
+        <a:ln w="12700" cap="flat" cmpd="sng" algn="ctr">
+          <a:solidFill>
+            <a:schemeClr val="phClr"/>
+          </a:solidFill>
+          <a:prstDash val="solid"/>
+          <a:miter lim="800000"/>
+        </a:ln>
+        <a:ln w="19050" cap="flat" cmpd="sng" algn="ctr">
+          <a:solidFill>
+            <a:schemeClr val="phClr"/>
+          </a:solidFill>
+          <a:prstDash val="solid"/>
+          <a:miter lim="800000"/>
+        </a:ln>
+      </a:lnStyleLst>
+      <a:effectStyleLst>
+        <a:effectStyle>
+          <a:effectLst/>
+        </a:effectStyle>
+        <a:effectStyle>
+          <a:effectLst/>
+        </a:effectStyle>
+        <a:effectStyle>
+          <a:effectLst>
+            <a:outerShdw blurRad="57150" dist="19050" dir="5400000" algn="ctr" rotWithShape="0">
+              <a:srgbClr val="000000">
+                <a:alpha val="63000"/>
+              </a:srgbClr>
+            </a:outerShdw>
+          </a:effectLst>
+        </a:effectStyle>
+      </a:effectStyleLst>
+      <a:bgFillStyleLst>
+        <a:solidFill>
+          <a:schemeClr val="phClr"/>
+        </a:solidFill>
+        <a:solidFill>
+          <a:schemeClr val="phClr">
+            <a:tint val="95000"/>
+            <a:satMod val="170000"/>
+          </a:schemeClr>
+        </a:solidFill>
+        <a:gradFill rotWithShape="1">
+          <a:gsLst>
+            <a:gs pos="0">
+              <a:schemeClr val="phClr">
+                <a:tint val="93000"/>
+                <a:satMod val="150000"/>
+                <a:shade val="98000"/>
+                <a:lumMod val="102000"/>
+              </a:schemeClr>
+            </a:gs>
+            <a:gs pos="50000">
+              <a:schemeClr val="phClr">
+                <a:tint val="98000"/>
+                <a:satMod val="130000"/>
+                <a:shade val="90000"/>
+                <a:lumMod val="103000"/>
+              </a:schemeClr>
+            </a:gs>
+            <a:gs pos="100000">
+              <a:schemeClr val="phClr">
+                <a:shade val="63000"/>
+                <a:satMod val="120000"/>
+              </a:schemeClr>
+            </a:gs>
+          </a:gsLst>
+          <a:lin ang="5400000" scaled="0"/>
+        </a:gradFill>
+      </a:bgFillStyleLst>
+    </a:fmtScheme>
+  </a:themeElements>
+  <a:objectDefaults/>
+  <a:extraClrSchemeLst/>
+  <a:extLst>
+    <a:ext uri="{05A4C25C-085E-4340-85A3-A5531E510DB2}">
+      <thm15:themeFamily xmlns:thm15="http://schemas.microsoft.com/office/thememl/2012/main" name="Office Theme" id="{62F939B6-93AF-4DB8-9C6B-D6C7DFDC589F}" vid="{4A3C46E8-61CC-4603-A589-7422A47A8E4A}"/>
+    </a:ext>
+  </a:extLst>
+</a:theme>
 </file>